--- a/submission/SANAD_Pitch_Deck_Warba_Bank.pptx
+++ b/submission/SANAD_Pitch_Deck_Warba_Bank.pptx
@@ -13,6 +13,11 @@
     <p:sldId id="261" r:id="rId12"/>
     <p:sldId id="262" r:id="rId13"/>
     <p:sldId id="263" r:id="rId14"/>
+    <p:sldId id="264" r:id="rId15"/>
+    <p:sldId id="265" r:id="rId16"/>
+    <p:sldId id="266" r:id="rId17"/>
+    <p:sldId id="267" r:id="rId18"/>
+    <p:sldId id="268" r:id="rId19"/>
   </p:sldIdLst>
   <p:sldSz cx="12191695" cy="6858000" type="screen4x3"/>
   <p:notesSz cx="6858000" cy="9144000"/>
@@ -3146,8 +3151,8 @@
         </p:nvSpPr>
         <p:spPr>
           <a:xfrm>
-            <a:off x="914400" y="1645920"/>
-            <a:ext cx="10332720" cy="3200400"/>
+            <a:off x="914400" y="1371600"/>
+            <a:ext cx="10332720" cy="3291840"/>
           </a:xfrm>
           <a:prstGeom prst="rect">
             <a:avLst/>
@@ -3174,9 +3179,9 @@
           <a:p>
             <a:pPr>
               <a:spcBef>
-                <a:spcPts val="800"/>
-              </a:spcBef>
-              <a:defRPr sz="4800" b="1">
+                <a:spcPts val="600"/>
+              </a:spcBef>
+              <a:defRPr sz="4600" b="1">
                 <a:solidFill>
                   <a:srgbClr val="FFFFFF"/>
                 </a:solidFill>
@@ -3191,7 +3196,7 @@
               <a:spcBef>
                 <a:spcPts val="600"/>
               </a:spcBef>
-              <a:defRPr sz="2200">
+              <a:defRPr sz="2200" b="1">
                 <a:solidFill>
                   <a:srgbClr val="3B82F6"/>
                 </a:solidFill>
@@ -3204,7 +3209,7 @@
           <a:p>
             <a:pPr>
               <a:spcBef>
-                <a:spcPts val="1600"/>
+                <a:spcPts val="1400"/>
               </a:spcBef>
               <a:defRPr sz="1400">
                 <a:solidFill>
@@ -3217,7 +3222,7 @@
             </a:r>
             <a:br/>
             <a:r>
-              <a:t>From an 11-Day Manual Bottleneck to a 38-Second Perfected Credit Dossier</a:t>
+              <a:t>From an 11-Day Manual Friction into a 38-Second Perfected Credit Dossier</a:t>
             </a:r>
           </a:p>
         </p:txBody>
@@ -3230,8 +3235,8 @@
         </p:nvSpPr>
         <p:spPr>
           <a:xfrm>
-            <a:off x="914400" y="4754880"/>
-            <a:ext cx="10332720" cy="1188720"/>
+            <a:off x="914400" y="4480560"/>
+            <a:ext cx="10332720" cy="1737360"/>
           </a:xfrm>
           <a:prstGeom prst="roundRect">
             <a:avLst/>
@@ -3275,8 +3280,8 @@
         </p:nvSpPr>
         <p:spPr>
           <a:xfrm>
-            <a:off x="1097280" y="4892040"/>
-            <a:ext cx="9966960" cy="914400"/>
+            <a:off x="1097280" y="4572000"/>
+            <a:ext cx="9966960" cy="1554480"/>
           </a:xfrm>
           <a:prstGeom prst="rect">
             <a:avLst/>
@@ -3292,24 +3297,2026 @@
             <a:pPr>
               <a:defRPr sz="1300" b="1">
                 <a:solidFill>
+                  <a:srgbClr val="10B981"/>
+                </a:solidFill>
+              </a:defRPr>
+            </a:pPr>
+            <a:r>
+              <a:t>👥 Core Team: Najimdeen Adam Oyeyemi &amp; Olagunju Temitope</a:t>
+            </a:r>
+          </a:p>
+          <a:p>
+            <a:pPr>
+              <a:spcBef>
+                <a:spcPts val="300"/>
+              </a:spcBef>
+              <a:defRPr sz="1100" b="1">
+                <a:solidFill>
                   <a:srgbClr val="FFFFFF"/>
                 </a:solidFill>
               </a:defRPr>
             </a:pPr>
             <a:r>
-              <a:t>🌐 Live Production Web App: https://sanad-engine.netlify.app</a:t>
-            </a:r>
-          </a:p>
-          <a:p>
-            <a:pPr>
-              <a:defRPr sz="1100">
+              <a:t>💻 Stack: React 19, TypeScript, Vite, Python (FastAPI), Google Gemini 2.5, Docker, Railway, Netlify</a:t>
+            </a:r>
+          </a:p>
+          <a:p>
+            <a:pPr>
+              <a:spcBef>
+                <a:spcPts val="300"/>
+              </a:spcBef>
+              <a:defRPr sz="1050" b="1">
+                <a:solidFill>
+                  <a:srgbClr val="3B82F6"/>
+                </a:solidFill>
+              </a:defRPr>
+            </a:pPr>
+            <a:r>
+              <a:t>🌐 Live Production Web App: https://sanad-engine.netlify.app | ⚡ Backend API: https://sanad-production-9d51.up.railway.app/health</a:t>
+            </a:r>
+          </a:p>
+          <a:p>
+            <a:pPr>
+              <a:spcBef>
+                <a:spcPts val="300"/>
+              </a:spcBef>
+              <a:defRPr sz="1000">
                 <a:solidFill>
                   <a:srgbClr val="94A3B8"/>
                 </a:solidFill>
               </a:defRPr>
             </a:pPr>
             <a:r>
-              <a:t>⚡ Backend API: https://sanad-production-9d51.up.railway.app | Code: https://github.com/anajimdeen01-debug/sanad-frontend</a:t>
+              <a:t>📂 Public GitHub Repository: https://github.com/anajimdeen01-debug/sanad-frontend</a:t>
+            </a:r>
+            <a:br/>
+            <a:r>
+              <a:t>📜 Standard Adherence: AAOIFI Standards No. 21 &amp; 35 | Central Bank of Kuwait (CBK) Risk Covenants</a:t>
+            </a:r>
+          </a:p>
+        </p:txBody>
+      </p:sp>
+    </p:spTree>
+  </p:cSld>
+  <p:clrMapOvr>
+    <a:masterClrMapping/>
+  </p:clrMapOvr>
+</p:sld>
+</file>
+
+<file path=ppt/slides/slide10.xml><?xml version="1.0" encoding="utf-8"?>
+<p:sld xmlns:a="http://schemas.openxmlformats.org/drawingml/2006/main" xmlns:p="http://schemas.openxmlformats.org/presentationml/2006/main" xmlns:r="http://schemas.openxmlformats.org/officeDocument/2006/relationships">
+  <p:cSld>
+    <p:spTree>
+      <p:nvGrpSpPr>
+        <p:cNvPr id="1" name=""/>
+        <p:cNvGrpSpPr/>
+        <p:nvPr/>
+      </p:nvGrpSpPr>
+      <p:grpSpPr/>
+      <p:sp>
+        <p:nvSpPr>
+          <p:cNvPr id="2" name="Rectangle 1"/>
+          <p:cNvSpPr/>
+          <p:nvPr/>
+        </p:nvSpPr>
+        <p:spPr>
+          <a:xfrm>
+            <a:off x="0" y="0"/>
+            <a:ext cx="12191695" cy="6858000"/>
+          </a:xfrm>
+          <a:prstGeom prst="rect">
+            <a:avLst/>
+          </a:prstGeom>
+          <a:solidFill>
+            <a:srgbClr val="0B0F19"/>
+          </a:solidFill>
+          <a:ln>
+            <a:noFill/>
+          </a:ln>
+        </p:spPr>
+        <p:style>
+          <a:lnRef idx="1">
+            <a:schemeClr val="accent1"/>
+          </a:lnRef>
+          <a:fillRef idx="3">
+            <a:schemeClr val="accent1"/>
+          </a:fillRef>
+          <a:effectRef idx="2">
+            <a:schemeClr val="accent1"/>
+          </a:effectRef>
+          <a:fontRef idx="minor">
+            <a:schemeClr val="lt1"/>
+          </a:fontRef>
+        </p:style>
+        <p:txBody>
+          <a:bodyPr rtlCol="0" anchor="ctr"/>
+          <a:lstStyle/>
+          <a:p>
+            <a:pPr algn="ctr"/>
+          </a:p>
+        </p:txBody>
+      </p:sp>
+      <p:sp>
+        <p:nvSpPr>
+          <p:cNvPr id="3" name="TextBox 2"/>
+          <p:cNvSpPr txBox="1"/>
+          <p:nvPr/>
+        </p:nvSpPr>
+        <p:spPr>
+          <a:xfrm>
+            <a:off x="731520" y="365760"/>
+            <a:ext cx="10058400" cy="365760"/>
+          </a:xfrm>
+          <a:prstGeom prst="rect">
+            <a:avLst/>
+          </a:prstGeom>
+          <a:noFill/>
+        </p:spPr>
+        <p:txBody>
+          <a:bodyPr wrap="square">
+            <a:spAutoFit/>
+          </a:bodyPr>
+          <a:lstStyle/>
+          <a:p>
+            <a:pPr>
+              <a:defRPr sz="1100" b="1">
+                <a:solidFill>
+                  <a:srgbClr val="3B82F6"/>
+                </a:solidFill>
+              </a:defRPr>
+            </a:pPr>
+            <a:r>
+              <a:t>WARBA BANK CORPORATE BANKING · TRACK 1</a:t>
+            </a:r>
+          </a:p>
+        </p:txBody>
+      </p:sp>
+      <p:sp>
+        <p:nvSpPr>
+          <p:cNvPr id="4" name="TextBox 3"/>
+          <p:cNvSpPr txBox="1"/>
+          <p:nvPr/>
+        </p:nvSpPr>
+        <p:spPr>
+          <a:xfrm>
+            <a:off x="731520" y="685800"/>
+            <a:ext cx="10515600" cy="731520"/>
+          </a:xfrm>
+          <a:prstGeom prst="rect">
+            <a:avLst/>
+          </a:prstGeom>
+          <a:noFill/>
+        </p:spPr>
+        <p:txBody>
+          <a:bodyPr wrap="square">
+            <a:spAutoFit/>
+          </a:bodyPr>
+          <a:lstStyle/>
+          <a:p>
+            <a:pPr>
+              <a:defRPr sz="2200" b="1">
+                <a:solidFill>
+                  <a:srgbClr val="FFFFFF"/>
+                </a:solidFill>
+              </a:defRPr>
+            </a:pPr>
+            <a:r>
+              <a:t>Front-Office Growth: Proactive RM Revenue Radar</a:t>
+            </a:r>
+          </a:p>
+        </p:txBody>
+      </p:sp>
+      <p:sp>
+        <p:nvSpPr>
+          <p:cNvPr id="5" name="Rounded Rectangle 4"/>
+          <p:cNvSpPr/>
+          <p:nvPr/>
+        </p:nvSpPr>
+        <p:spPr>
+          <a:xfrm>
+            <a:off x="731520" y="1645920"/>
+            <a:ext cx="3291840" cy="4389120"/>
+          </a:xfrm>
+          <a:prstGeom prst="roundRect">
+            <a:avLst/>
+          </a:prstGeom>
+          <a:solidFill>
+            <a:srgbClr val="12192D"/>
+          </a:solidFill>
+          <a:ln w="19050">
+            <a:solidFill>
+              <a:srgbClr val="3B82F6"/>
+            </a:solidFill>
+          </a:ln>
+        </p:spPr>
+        <p:style>
+          <a:lnRef idx="1">
+            <a:schemeClr val="accent1"/>
+          </a:lnRef>
+          <a:fillRef idx="3">
+            <a:schemeClr val="accent1"/>
+          </a:fillRef>
+          <a:effectRef idx="2">
+            <a:schemeClr val="accent1"/>
+          </a:effectRef>
+          <a:fontRef idx="minor">
+            <a:schemeClr val="lt1"/>
+          </a:fontRef>
+        </p:style>
+        <p:txBody>
+          <a:bodyPr rtlCol="0" anchor="ctr"/>
+          <a:lstStyle/>
+          <a:p>
+            <a:pPr algn="ctr"/>
+          </a:p>
+        </p:txBody>
+      </p:sp>
+      <p:sp>
+        <p:nvSpPr>
+          <p:cNvPr id="6" name="TextBox 5"/>
+          <p:cNvSpPr txBox="1"/>
+          <p:nvPr/>
+        </p:nvSpPr>
+        <p:spPr>
+          <a:xfrm>
+            <a:off x="914400" y="1783080"/>
+            <a:ext cx="2926080" cy="4114800"/>
+          </a:xfrm>
+          <a:prstGeom prst="rect">
+            <a:avLst/>
+          </a:prstGeom>
+          <a:noFill/>
+        </p:spPr>
+        <p:txBody>
+          <a:bodyPr wrap="square">
+            <a:spAutoFit/>
+          </a:bodyPr>
+          <a:lstStyle/>
+          <a:p>
+            <a:pPr>
+              <a:defRPr sz="1500" b="1">
+                <a:solidFill>
+                  <a:srgbClr val="FFFFFF"/>
+                </a:solidFill>
+              </a:defRPr>
+            </a:pPr>
+            <a:r>
+              <a:t>Turnaround Velocity</a:t>
+            </a:r>
+          </a:p>
+          <a:p>
+            <a:pPr>
+              <a:defRPr sz="1000" b="1">
+                <a:solidFill>
+                  <a:srgbClr val="3B82F6"/>
+                </a:solidFill>
+              </a:defRPr>
+            </a:pPr>
+            <a:r>
+              <a:t>Time-to-Yes Advantage</a:t>
+            </a:r>
+          </a:p>
+          <a:p>
+            <a:pPr>
+              <a:spcBef>
+                <a:spcPts val="500"/>
+              </a:spcBef>
+              <a:defRPr sz="1150">
+                <a:solidFill>
+                  <a:srgbClr val="CBD5E1"/>
+                </a:solidFill>
+              </a:defRPr>
+            </a:pPr>
+            <a:r>
+              <a:t>•  11 Days → 38 Seconds</a:t>
+            </a:r>
+          </a:p>
+          <a:p>
+            <a:pPr>
+              <a:spcBef>
+                <a:spcPts val="500"/>
+              </a:spcBef>
+              <a:defRPr sz="1150">
+                <a:solidFill>
+                  <a:srgbClr val="CBD5E1"/>
+                </a:solidFill>
+              </a:defRPr>
+            </a:pPr>
+            <a:r>
+              <a:t>•  94% reduction in manual document synthesis time.</a:t>
+            </a:r>
+          </a:p>
+          <a:p>
+            <a:pPr>
+              <a:spcBef>
+                <a:spcPts val="500"/>
+              </a:spcBef>
+              <a:defRPr sz="1150">
+                <a:solidFill>
+                  <a:srgbClr val="CBD5E1"/>
+                </a:solidFill>
+              </a:defRPr>
+            </a:pPr>
+            <a:r>
+              <a:t>•  Accelerates credit approval turnaround from 2 weeks to same-day review.</a:t>
+            </a:r>
+          </a:p>
+          <a:p>
+            <a:pPr>
+              <a:spcBef>
+                <a:spcPts val="500"/>
+              </a:spcBef>
+              <a:defRPr sz="1150">
+                <a:solidFill>
+                  <a:srgbClr val="CBD5E1"/>
+                </a:solidFill>
+              </a:defRPr>
+            </a:pPr>
+            <a:r>
+              <a:t>•  Allows Warba Bank to capture prime commercial borrowers first.</a:t>
+            </a:r>
+          </a:p>
+        </p:txBody>
+      </p:sp>
+      <p:sp>
+        <p:nvSpPr>
+          <p:cNvPr id="7" name="Rounded Rectangle 6"/>
+          <p:cNvSpPr/>
+          <p:nvPr/>
+        </p:nvSpPr>
+        <p:spPr>
+          <a:xfrm>
+            <a:off x="4389120" y="1645920"/>
+            <a:ext cx="3291840" cy="4389120"/>
+          </a:xfrm>
+          <a:prstGeom prst="roundRect">
+            <a:avLst/>
+          </a:prstGeom>
+          <a:solidFill>
+            <a:srgbClr val="12192D"/>
+          </a:solidFill>
+          <a:ln w="19050">
+            <a:solidFill>
+              <a:srgbClr val="10B981"/>
+            </a:solidFill>
+          </a:ln>
+        </p:spPr>
+        <p:style>
+          <a:lnRef idx="1">
+            <a:schemeClr val="accent1"/>
+          </a:lnRef>
+          <a:fillRef idx="3">
+            <a:schemeClr val="accent1"/>
+          </a:fillRef>
+          <a:effectRef idx="2">
+            <a:schemeClr val="accent1"/>
+          </a:effectRef>
+          <a:fontRef idx="minor">
+            <a:schemeClr val="lt1"/>
+          </a:fontRef>
+        </p:style>
+        <p:txBody>
+          <a:bodyPr rtlCol="0" anchor="ctr"/>
+          <a:lstStyle/>
+          <a:p>
+            <a:pPr algn="ctr"/>
+          </a:p>
+        </p:txBody>
+      </p:sp>
+      <p:sp>
+        <p:nvSpPr>
+          <p:cNvPr id="8" name="TextBox 7"/>
+          <p:cNvSpPr txBox="1"/>
+          <p:nvPr/>
+        </p:nvSpPr>
+        <p:spPr>
+          <a:xfrm>
+            <a:off x="4572000" y="1783080"/>
+            <a:ext cx="2926080" cy="4114800"/>
+          </a:xfrm>
+          <a:prstGeom prst="rect">
+            <a:avLst/>
+          </a:prstGeom>
+          <a:noFill/>
+        </p:spPr>
+        <p:txBody>
+          <a:bodyPr wrap="square">
+            <a:spAutoFit/>
+          </a:bodyPr>
+          <a:lstStyle/>
+          <a:p>
+            <a:pPr>
+              <a:defRPr sz="1500" b="1">
+                <a:solidFill>
+                  <a:srgbClr val="FFFFFF"/>
+                </a:solidFill>
+              </a:defRPr>
+            </a:pPr>
+            <a:r>
+              <a:t>Balance-Sheet Expansion</a:t>
+            </a:r>
+          </a:p>
+          <a:p>
+            <a:pPr>
+              <a:defRPr sz="1000" b="1">
+                <a:solidFill>
+                  <a:srgbClr val="10B981"/>
+                </a:solidFill>
+              </a:defRPr>
+            </a:pPr>
+            <a:r>
+              <a:t>RM Revenue Radar</a:t>
+            </a:r>
+          </a:p>
+          <a:p>
+            <a:pPr>
+              <a:spcBef>
+                <a:spcPts val="500"/>
+              </a:spcBef>
+              <a:defRPr sz="1150">
+                <a:solidFill>
+                  <a:srgbClr val="CBD5E1"/>
+                </a:solidFill>
+              </a:defRPr>
+            </a:pPr>
+            <a:r>
+              <a:t>•  +KWD 700K Facility Upsell</a:t>
+            </a:r>
+          </a:p>
+          <a:p>
+            <a:pPr>
+              <a:spcBef>
+                <a:spcPts val="500"/>
+              </a:spcBef>
+              <a:defRPr sz="1150">
+                <a:solidFill>
+                  <a:srgbClr val="CBD5E1"/>
+                </a:solidFill>
+              </a:defRPr>
+            </a:pPr>
+            <a:r>
+              <a:t>•  Detected unencumbered liquid inventory cushion of KWD 1.2M.</a:t>
+            </a:r>
+          </a:p>
+          <a:p>
+            <a:pPr>
+              <a:spcBef>
+                <a:spcPts val="500"/>
+              </a:spcBef>
+              <a:defRPr sz="1150">
+                <a:solidFill>
+                  <a:srgbClr val="CBD5E1"/>
+                </a:solidFill>
+              </a:defRPr>
+            </a:pPr>
+            <a:r>
+              <a:t>•  Recommended +KWD 700k Murabaha facility expansion (DSCR 3.80x safe).</a:t>
+            </a:r>
+          </a:p>
+          <a:p>
+            <a:pPr>
+              <a:spcBef>
+                <a:spcPts val="500"/>
+              </a:spcBef>
+              <a:defRPr sz="1150">
+                <a:solidFill>
+                  <a:srgbClr val="CBD5E1"/>
+                </a:solidFill>
+              </a:defRPr>
+            </a:pPr>
+            <a:r>
+              <a:t>•  Generates +KWD 39,375 net profit margin annually for Warba Bank.</a:t>
+            </a:r>
+          </a:p>
+        </p:txBody>
+      </p:sp>
+      <p:sp>
+        <p:nvSpPr>
+          <p:cNvPr id="9" name="Rounded Rectangle 8"/>
+          <p:cNvSpPr/>
+          <p:nvPr/>
+        </p:nvSpPr>
+        <p:spPr>
+          <a:xfrm>
+            <a:off x="8046720" y="1645920"/>
+            <a:ext cx="3291840" cy="4389120"/>
+          </a:xfrm>
+          <a:prstGeom prst="roundRect">
+            <a:avLst/>
+          </a:prstGeom>
+          <a:solidFill>
+            <a:srgbClr val="12192D"/>
+          </a:solidFill>
+          <a:ln w="19050">
+            <a:solidFill>
+              <a:srgbClr val="F59E0B"/>
+            </a:solidFill>
+          </a:ln>
+        </p:spPr>
+        <p:style>
+          <a:lnRef idx="1">
+            <a:schemeClr val="accent1"/>
+          </a:lnRef>
+          <a:fillRef idx="3">
+            <a:schemeClr val="accent1"/>
+          </a:fillRef>
+          <a:effectRef idx="2">
+            <a:schemeClr val="accent1"/>
+          </a:effectRef>
+          <a:fontRef idx="minor">
+            <a:schemeClr val="lt1"/>
+          </a:fontRef>
+        </p:style>
+        <p:txBody>
+          <a:bodyPr rtlCol="0" anchor="ctr"/>
+          <a:lstStyle/>
+          <a:p>
+            <a:pPr algn="ctr"/>
+          </a:p>
+        </p:txBody>
+      </p:sp>
+      <p:sp>
+        <p:nvSpPr>
+          <p:cNvPr id="10" name="TextBox 9"/>
+          <p:cNvSpPr txBox="1"/>
+          <p:nvPr/>
+        </p:nvSpPr>
+        <p:spPr>
+          <a:xfrm>
+            <a:off x="8229600" y="1783080"/>
+            <a:ext cx="2926080" cy="4114800"/>
+          </a:xfrm>
+          <a:prstGeom prst="rect">
+            <a:avLst/>
+          </a:prstGeom>
+          <a:noFill/>
+        </p:spPr>
+        <p:txBody>
+          <a:bodyPr wrap="square">
+            <a:spAutoFit/>
+          </a:bodyPr>
+          <a:lstStyle/>
+          <a:p>
+            <a:pPr>
+              <a:defRPr sz="1500" b="1">
+                <a:solidFill>
+                  <a:srgbClr val="FFFFFF"/>
+                </a:solidFill>
+              </a:defRPr>
+            </a:pPr>
+            <a:r>
+              <a:t>Trade Finance Cross-Sell</a:t>
+            </a:r>
+          </a:p>
+          <a:p>
+            <a:pPr>
+              <a:defRPr sz="1000" b="1">
+                <a:solidFill>
+                  <a:srgbClr val="F59E0B"/>
+                </a:solidFill>
+              </a:defRPr>
+            </a:pPr>
+            <a:r>
+              <a:t>Wallet-Share Growth</a:t>
+            </a:r>
+          </a:p>
+          <a:p>
+            <a:pPr>
+              <a:spcBef>
+                <a:spcPts val="500"/>
+              </a:spcBef>
+              <a:defRPr sz="1150">
+                <a:solidFill>
+                  <a:srgbClr val="CBD5E1"/>
+                </a:solidFill>
+              </a:defRPr>
+            </a:pPr>
+            <a:r>
+              <a:t>•  Import LC &amp; FX Hedging</a:t>
+            </a:r>
+          </a:p>
+          <a:p>
+            <a:pPr>
+              <a:spcBef>
+                <a:spcPts val="500"/>
+              </a:spcBef>
+              <a:defRPr sz="1150">
+                <a:solidFill>
+                  <a:srgbClr val="CBD5E1"/>
+                </a:solidFill>
+              </a:defRPr>
+            </a:pPr>
+            <a:r>
+              <a:t>•  Analyzed supplier import ledgers from Southeast Asian suppliers.</a:t>
+            </a:r>
+          </a:p>
+          <a:p>
+            <a:pPr>
+              <a:spcBef>
+                <a:spcPts val="500"/>
+              </a:spcBef>
+              <a:defRPr sz="1150">
+                <a:solidFill>
+                  <a:srgbClr val="CBD5E1"/>
+                </a:solidFill>
+              </a:defRPr>
+            </a:pPr>
+            <a:r>
+              <a:t>•  Pre-drafted proposal for Import Letters of Credit (LCs) and FX forward lines.</a:t>
+            </a:r>
+          </a:p>
+          <a:p>
+            <a:pPr>
+              <a:spcBef>
+                <a:spcPts val="500"/>
+              </a:spcBef>
+              <a:defRPr sz="1150">
+                <a:solidFill>
+                  <a:srgbClr val="CBD5E1"/>
+                </a:solidFill>
+              </a:defRPr>
+            </a:pPr>
+            <a:r>
+              <a:t>•  Expands fee income wallet share while deepening client loyalty.</a:t>
+            </a:r>
+          </a:p>
+        </p:txBody>
+      </p:sp>
+    </p:spTree>
+  </p:cSld>
+  <p:clrMapOvr>
+    <a:masterClrMapping/>
+  </p:clrMapOvr>
+</p:sld>
+</file>
+
+<file path=ppt/slides/slide11.xml><?xml version="1.0" encoding="utf-8"?>
+<p:sld xmlns:a="http://schemas.openxmlformats.org/drawingml/2006/main" xmlns:p="http://schemas.openxmlformats.org/presentationml/2006/main" xmlns:r="http://schemas.openxmlformats.org/officeDocument/2006/relationships">
+  <p:cSld>
+    <p:spTree>
+      <p:nvGrpSpPr>
+        <p:cNvPr id="1" name=""/>
+        <p:cNvGrpSpPr/>
+        <p:nvPr/>
+      </p:nvGrpSpPr>
+      <p:grpSpPr/>
+      <p:sp>
+        <p:nvSpPr>
+          <p:cNvPr id="2" name="Rectangle 1"/>
+          <p:cNvSpPr/>
+          <p:nvPr/>
+        </p:nvSpPr>
+        <p:spPr>
+          <a:xfrm>
+            <a:off x="0" y="0"/>
+            <a:ext cx="12191695" cy="6858000"/>
+          </a:xfrm>
+          <a:prstGeom prst="rect">
+            <a:avLst/>
+          </a:prstGeom>
+          <a:solidFill>
+            <a:srgbClr val="0B0F19"/>
+          </a:solidFill>
+          <a:ln>
+            <a:noFill/>
+          </a:ln>
+        </p:spPr>
+        <p:style>
+          <a:lnRef idx="1">
+            <a:schemeClr val="accent1"/>
+          </a:lnRef>
+          <a:fillRef idx="3">
+            <a:schemeClr val="accent1"/>
+          </a:fillRef>
+          <a:effectRef idx="2">
+            <a:schemeClr val="accent1"/>
+          </a:effectRef>
+          <a:fontRef idx="minor">
+            <a:schemeClr val="lt1"/>
+          </a:fontRef>
+        </p:style>
+        <p:txBody>
+          <a:bodyPr rtlCol="0" anchor="ctr"/>
+          <a:lstStyle/>
+          <a:p>
+            <a:pPr algn="ctr"/>
+          </a:p>
+        </p:txBody>
+      </p:sp>
+      <p:sp>
+        <p:nvSpPr>
+          <p:cNvPr id="3" name="TextBox 2"/>
+          <p:cNvSpPr txBox="1"/>
+          <p:nvPr/>
+        </p:nvSpPr>
+        <p:spPr>
+          <a:xfrm>
+            <a:off x="731520" y="365760"/>
+            <a:ext cx="10058400" cy="365760"/>
+          </a:xfrm>
+          <a:prstGeom prst="rect">
+            <a:avLst/>
+          </a:prstGeom>
+          <a:noFill/>
+        </p:spPr>
+        <p:txBody>
+          <a:bodyPr wrap="square">
+            <a:spAutoFit/>
+          </a:bodyPr>
+          <a:lstStyle/>
+          <a:p>
+            <a:pPr>
+              <a:defRPr sz="1100" b="1">
+                <a:solidFill>
+                  <a:srgbClr val="3B82F6"/>
+                </a:solidFill>
+              </a:defRPr>
+            </a:pPr>
+            <a:r>
+              <a:t>WARBA BANK CORPORATE BANKING · TRACK 1</a:t>
+            </a:r>
+          </a:p>
+        </p:txBody>
+      </p:sp>
+      <p:sp>
+        <p:nvSpPr>
+          <p:cNvPr id="4" name="TextBox 3"/>
+          <p:cNvSpPr txBox="1"/>
+          <p:nvPr/>
+        </p:nvSpPr>
+        <p:spPr>
+          <a:xfrm>
+            <a:off x="731520" y="685800"/>
+            <a:ext cx="10515600" cy="731520"/>
+          </a:xfrm>
+          <a:prstGeom prst="rect">
+            <a:avLst/>
+          </a:prstGeom>
+          <a:noFill/>
+        </p:spPr>
+        <p:txBody>
+          <a:bodyPr wrap="square">
+            <a:spAutoFit/>
+          </a:bodyPr>
+          <a:lstStyle/>
+          <a:p>
+            <a:pPr>
+              <a:defRPr sz="2200" b="1">
+                <a:solidFill>
+                  <a:srgbClr val="FFFFFF"/>
+                </a:solidFill>
+              </a:defRPr>
+            </a:pPr>
+            <a:r>
+              <a:t>Competitive Advantage: Why SANAD Is Uniquely Defensible</a:t>
+            </a:r>
+          </a:p>
+        </p:txBody>
+      </p:sp>
+      <p:sp>
+        <p:nvSpPr>
+          <p:cNvPr id="5" name="Rounded Rectangle 4"/>
+          <p:cNvSpPr/>
+          <p:nvPr/>
+        </p:nvSpPr>
+        <p:spPr>
+          <a:xfrm>
+            <a:off x="731520" y="1645920"/>
+            <a:ext cx="5120640" cy="4389120"/>
+          </a:xfrm>
+          <a:prstGeom prst="roundRect">
+            <a:avLst/>
+          </a:prstGeom>
+          <a:solidFill>
+            <a:srgbClr val="12192D"/>
+          </a:solidFill>
+          <a:ln w="19050">
+            <a:solidFill>
+              <a:srgbClr val="EF4444"/>
+            </a:solidFill>
+          </a:ln>
+        </p:spPr>
+        <p:style>
+          <a:lnRef idx="1">
+            <a:schemeClr val="accent1"/>
+          </a:lnRef>
+          <a:fillRef idx="3">
+            <a:schemeClr val="accent1"/>
+          </a:fillRef>
+          <a:effectRef idx="2">
+            <a:schemeClr val="accent1"/>
+          </a:effectRef>
+          <a:fontRef idx="minor">
+            <a:schemeClr val="lt1"/>
+          </a:fontRef>
+        </p:style>
+        <p:txBody>
+          <a:bodyPr rtlCol="0" anchor="ctr"/>
+          <a:lstStyle/>
+          <a:p>
+            <a:pPr algn="ctr"/>
+          </a:p>
+        </p:txBody>
+      </p:sp>
+      <p:sp>
+        <p:nvSpPr>
+          <p:cNvPr id="6" name="TextBox 5"/>
+          <p:cNvSpPr txBox="1"/>
+          <p:nvPr/>
+        </p:nvSpPr>
+        <p:spPr>
+          <a:xfrm>
+            <a:off x="914400" y="1783080"/>
+            <a:ext cx="4754880" cy="4114800"/>
+          </a:xfrm>
+          <a:prstGeom prst="rect">
+            <a:avLst/>
+          </a:prstGeom>
+          <a:noFill/>
+        </p:spPr>
+        <p:txBody>
+          <a:bodyPr wrap="square">
+            <a:spAutoFit/>
+          </a:bodyPr>
+          <a:lstStyle/>
+          <a:p>
+            <a:pPr>
+              <a:defRPr sz="1500" b="1">
+                <a:solidFill>
+                  <a:srgbClr val="FFFFFF"/>
+                </a:solidFill>
+              </a:defRPr>
+            </a:pPr>
+            <a:r>
+              <a:t>Why Generic GenAI &amp; OCR Fail in Banking</a:t>
+            </a:r>
+          </a:p>
+          <a:p>
+            <a:pPr>
+              <a:defRPr sz="1000" b="1">
+                <a:solidFill>
+                  <a:srgbClr val="EF4444"/>
+                </a:solidFill>
+              </a:defRPr>
+            </a:pPr>
+            <a:r>
+              <a:t>Existing Technological Limits</a:t>
+            </a:r>
+          </a:p>
+          <a:p>
+            <a:pPr>
+              <a:spcBef>
+                <a:spcPts val="500"/>
+              </a:spcBef>
+              <a:defRPr sz="1150">
+                <a:solidFill>
+                  <a:srgbClr val="CBD5E1"/>
+                </a:solidFill>
+              </a:defRPr>
+            </a:pPr>
+            <a:r>
+              <a:t>•  Generic GenAI (ChatGPT/Claude): Evaluates single prompts in isolation, suffers from hallucinations, lacks mathematical precision, and leaks sensitive PII to public clouds.</a:t>
+            </a:r>
+          </a:p>
+          <a:p>
+            <a:pPr>
+              <a:spcBef>
+                <a:spcPts val="500"/>
+              </a:spcBef>
+              <a:defRPr sz="1150">
+                <a:solidFill>
+                  <a:srgbClr val="CBD5E1"/>
+                </a:solidFill>
+              </a:defRPr>
+            </a:pPr>
+            <a:r>
+              <a:t>•  Legacy OCR (ABBYY/Kofax): Simply digitizes paper into text or raw tables. Zero adversarial circularization, zero understanding of Shariah standards, and zero ability to draft covenants.</a:t>
+            </a:r>
+          </a:p>
+          <a:p>
+            <a:pPr>
+              <a:spcBef>
+                <a:spcPts val="500"/>
+              </a:spcBef>
+              <a:defRPr sz="1150">
+                <a:solidFill>
+                  <a:srgbClr val="CBD5E1"/>
+                </a:solidFill>
+              </a:defRPr>
+            </a:pPr>
+            <a:r>
+              <a:t>•  Legacy Core Systems (Finacle): Pure transaction ledgers; unable to interpret unstructured legal gazettes or perform forensic audits.</a:t>
+            </a:r>
+          </a:p>
+        </p:txBody>
+      </p:sp>
+      <p:sp>
+        <p:nvSpPr>
+          <p:cNvPr id="7" name="Rounded Rectangle 6"/>
+          <p:cNvSpPr/>
+          <p:nvPr/>
+        </p:nvSpPr>
+        <p:spPr>
+          <a:xfrm>
+            <a:off x="6217920" y="1645920"/>
+            <a:ext cx="5120640" cy="4389120"/>
+          </a:xfrm>
+          <a:prstGeom prst="roundRect">
+            <a:avLst/>
+          </a:prstGeom>
+          <a:solidFill>
+            <a:srgbClr val="12192D"/>
+          </a:solidFill>
+          <a:ln w="19050">
+            <a:solidFill>
+              <a:srgbClr val="10B981"/>
+            </a:solidFill>
+          </a:ln>
+        </p:spPr>
+        <p:style>
+          <a:lnRef idx="1">
+            <a:schemeClr val="accent1"/>
+          </a:lnRef>
+          <a:fillRef idx="3">
+            <a:schemeClr val="accent1"/>
+          </a:fillRef>
+          <a:effectRef idx="2">
+            <a:schemeClr val="accent1"/>
+          </a:effectRef>
+          <a:fontRef idx="minor">
+            <a:schemeClr val="lt1"/>
+          </a:fontRef>
+        </p:style>
+        <p:txBody>
+          <a:bodyPr rtlCol="0" anchor="ctr"/>
+          <a:lstStyle/>
+          <a:p>
+            <a:pPr algn="ctr"/>
+          </a:p>
+        </p:txBody>
+      </p:sp>
+      <p:sp>
+        <p:nvSpPr>
+          <p:cNvPr id="8" name="TextBox 7"/>
+          <p:cNvSpPr txBox="1"/>
+          <p:nvPr/>
+        </p:nvSpPr>
+        <p:spPr>
+          <a:xfrm>
+            <a:off x="6400800" y="1783080"/>
+            <a:ext cx="4754880" cy="4114800"/>
+          </a:xfrm>
+          <a:prstGeom prst="rect">
+            <a:avLst/>
+          </a:prstGeom>
+          <a:noFill/>
+        </p:spPr>
+        <p:txBody>
+          <a:bodyPr wrap="square">
+            <a:spAutoFit/>
+          </a:bodyPr>
+          <a:lstStyle/>
+          <a:p>
+            <a:pPr>
+              <a:defRPr sz="1500" b="1">
+                <a:solidFill>
+                  <a:srgbClr val="FFFFFF"/>
+                </a:solidFill>
+              </a:defRPr>
+            </a:pPr>
+            <a:r>
+              <a:t>The SANAD Moat: Uniquely Built for Warba Bank</a:t>
+            </a:r>
+          </a:p>
+          <a:p>
+            <a:pPr>
+              <a:defRPr sz="1000" b="1">
+                <a:solidFill>
+                  <a:srgbClr val="10B981"/>
+                </a:solidFill>
+              </a:defRPr>
+            </a:pPr>
+            <a:r>
+              <a:t>Institutional Defensibility</a:t>
+            </a:r>
+          </a:p>
+          <a:p>
+            <a:pPr>
+              <a:spcBef>
+                <a:spcPts val="500"/>
+              </a:spcBef>
+              <a:defRPr sz="1150">
+                <a:solidFill>
+                  <a:srgbClr val="CBD5E1"/>
+                </a:solidFill>
+              </a:defRPr>
+            </a:pPr>
+            <a:r>
+              <a:t>•  Adversarial Multi-Source Circularization: The only engine that actively hunts contradictions between credit declarations and external registries.</a:t>
+            </a:r>
+          </a:p>
+          <a:p>
+            <a:pPr>
+              <a:spcBef>
+                <a:spcPts val="500"/>
+              </a:spcBef>
+              <a:defRPr sz="1150">
+                <a:solidFill>
+                  <a:srgbClr val="CBD5E1"/>
+                </a:solidFill>
+              </a:defRPr>
+            </a:pPr>
+            <a:r>
+              <a:t>•  Deterministic AAOIFI Taharah Engine: Solves Islamic banking's biggest friction by automating purification math down to the fil.</a:t>
+            </a:r>
+          </a:p>
+          <a:p>
+            <a:pPr>
+              <a:spcBef>
+                <a:spcPts val="500"/>
+              </a:spcBef>
+              <a:defRPr sz="1150">
+                <a:solidFill>
+                  <a:srgbClr val="CBD5E1"/>
+                </a:solidFill>
+              </a:defRPr>
+            </a:pPr>
+            <a:r>
+              <a:t>•  CBK Sovereign Privacy Shield: On-premise sanitization ensures zero regulatory air-gap breaches.</a:t>
+            </a:r>
+          </a:p>
+          <a:p>
+            <a:pPr>
+              <a:spcBef>
+                <a:spcPts val="500"/>
+              </a:spcBef>
+              <a:defRPr sz="1150">
+                <a:solidFill>
+                  <a:srgbClr val="CBD5E1"/>
+                </a:solidFill>
+              </a:defRPr>
+            </a:pPr>
+            <a:r>
+              <a:t>•  Cryptographic Governance Ledger: SHA-256 and Merkle root block height verify institutional auditability.</a:t>
+            </a:r>
+          </a:p>
+        </p:txBody>
+      </p:sp>
+    </p:spTree>
+  </p:cSld>
+  <p:clrMapOvr>
+    <a:masterClrMapping/>
+  </p:clrMapOvr>
+</p:sld>
+</file>
+
+<file path=ppt/slides/slide12.xml><?xml version="1.0" encoding="utf-8"?>
+<p:sld xmlns:a="http://schemas.openxmlformats.org/drawingml/2006/main" xmlns:p="http://schemas.openxmlformats.org/presentationml/2006/main" xmlns:r="http://schemas.openxmlformats.org/officeDocument/2006/relationships">
+  <p:cSld>
+    <p:spTree>
+      <p:nvGrpSpPr>
+        <p:cNvPr id="1" name=""/>
+        <p:cNvGrpSpPr/>
+        <p:nvPr/>
+      </p:nvGrpSpPr>
+      <p:grpSpPr/>
+      <p:sp>
+        <p:nvSpPr>
+          <p:cNvPr id="2" name="Rectangle 1"/>
+          <p:cNvSpPr/>
+          <p:nvPr/>
+        </p:nvSpPr>
+        <p:spPr>
+          <a:xfrm>
+            <a:off x="0" y="0"/>
+            <a:ext cx="12191695" cy="6858000"/>
+          </a:xfrm>
+          <a:prstGeom prst="rect">
+            <a:avLst/>
+          </a:prstGeom>
+          <a:solidFill>
+            <a:srgbClr val="0B0F19"/>
+          </a:solidFill>
+          <a:ln>
+            <a:noFill/>
+          </a:ln>
+        </p:spPr>
+        <p:style>
+          <a:lnRef idx="1">
+            <a:schemeClr val="accent1"/>
+          </a:lnRef>
+          <a:fillRef idx="3">
+            <a:schemeClr val="accent1"/>
+          </a:fillRef>
+          <a:effectRef idx="2">
+            <a:schemeClr val="accent1"/>
+          </a:effectRef>
+          <a:fontRef idx="minor">
+            <a:schemeClr val="lt1"/>
+          </a:fontRef>
+        </p:style>
+        <p:txBody>
+          <a:bodyPr rtlCol="0" anchor="ctr"/>
+          <a:lstStyle/>
+          <a:p>
+            <a:pPr algn="ctr"/>
+          </a:p>
+        </p:txBody>
+      </p:sp>
+      <p:sp>
+        <p:nvSpPr>
+          <p:cNvPr id="3" name="TextBox 2"/>
+          <p:cNvSpPr txBox="1"/>
+          <p:nvPr/>
+        </p:nvSpPr>
+        <p:spPr>
+          <a:xfrm>
+            <a:off x="731520" y="365760"/>
+            <a:ext cx="10058400" cy="365760"/>
+          </a:xfrm>
+          <a:prstGeom prst="rect">
+            <a:avLst/>
+          </a:prstGeom>
+          <a:noFill/>
+        </p:spPr>
+        <p:txBody>
+          <a:bodyPr wrap="square">
+            <a:spAutoFit/>
+          </a:bodyPr>
+          <a:lstStyle/>
+          <a:p>
+            <a:pPr>
+              <a:defRPr sz="1100" b="1">
+                <a:solidFill>
+                  <a:srgbClr val="3B82F6"/>
+                </a:solidFill>
+              </a:defRPr>
+            </a:pPr>
+            <a:r>
+              <a:t>WARBA BANK CORPORATE BANKING · TRACK 1</a:t>
+            </a:r>
+          </a:p>
+        </p:txBody>
+      </p:sp>
+      <p:sp>
+        <p:nvSpPr>
+          <p:cNvPr id="4" name="TextBox 3"/>
+          <p:cNvSpPr txBox="1"/>
+          <p:nvPr/>
+        </p:nvSpPr>
+        <p:spPr>
+          <a:xfrm>
+            <a:off x="731520" y="685800"/>
+            <a:ext cx="10515600" cy="731520"/>
+          </a:xfrm>
+          <a:prstGeom prst="rect">
+            <a:avLst/>
+          </a:prstGeom>
+          <a:noFill/>
+        </p:spPr>
+        <p:txBody>
+          <a:bodyPr wrap="square">
+            <a:spAutoFit/>
+          </a:bodyPr>
+          <a:lstStyle/>
+          <a:p>
+            <a:pPr>
+              <a:defRPr sz="2200" b="1">
+                <a:solidFill>
+                  <a:srgbClr val="FFFFFF"/>
+                </a:solidFill>
+              </a:defRPr>
+            </a:pPr>
+            <a:r>
+              <a:t>Core Engineering Team &amp; Production Technology Stack</a:t>
+            </a:r>
+          </a:p>
+        </p:txBody>
+      </p:sp>
+      <p:sp>
+        <p:nvSpPr>
+          <p:cNvPr id="5" name="Rounded Rectangle 4"/>
+          <p:cNvSpPr/>
+          <p:nvPr/>
+        </p:nvSpPr>
+        <p:spPr>
+          <a:xfrm>
+            <a:off x="731520" y="1645920"/>
+            <a:ext cx="5120640" cy="4389120"/>
+          </a:xfrm>
+          <a:prstGeom prst="roundRect">
+            <a:avLst/>
+          </a:prstGeom>
+          <a:solidFill>
+            <a:srgbClr val="12192D"/>
+          </a:solidFill>
+          <a:ln w="19050">
+            <a:solidFill>
+              <a:srgbClr val="10B981"/>
+            </a:solidFill>
+          </a:ln>
+        </p:spPr>
+        <p:style>
+          <a:lnRef idx="1">
+            <a:schemeClr val="accent1"/>
+          </a:lnRef>
+          <a:fillRef idx="3">
+            <a:schemeClr val="accent1"/>
+          </a:fillRef>
+          <a:effectRef idx="2">
+            <a:schemeClr val="accent1"/>
+          </a:effectRef>
+          <a:fontRef idx="minor">
+            <a:schemeClr val="lt1"/>
+          </a:fontRef>
+        </p:style>
+        <p:txBody>
+          <a:bodyPr rtlCol="0" anchor="ctr"/>
+          <a:lstStyle/>
+          <a:p>
+            <a:pPr algn="ctr"/>
+          </a:p>
+        </p:txBody>
+      </p:sp>
+      <p:sp>
+        <p:nvSpPr>
+          <p:cNvPr id="6" name="TextBox 5"/>
+          <p:cNvSpPr txBox="1"/>
+          <p:nvPr/>
+        </p:nvSpPr>
+        <p:spPr>
+          <a:xfrm>
+            <a:off x="914400" y="1783080"/>
+            <a:ext cx="4754880" cy="4114800"/>
+          </a:xfrm>
+          <a:prstGeom prst="rect">
+            <a:avLst/>
+          </a:prstGeom>
+          <a:noFill/>
+        </p:spPr>
+        <p:txBody>
+          <a:bodyPr wrap="square">
+            <a:spAutoFit/>
+          </a:bodyPr>
+          <a:lstStyle/>
+          <a:p>
+            <a:pPr>
+              <a:defRPr sz="1500" b="1">
+                <a:solidFill>
+                  <a:srgbClr val="FFFFFF"/>
+                </a:solidFill>
+              </a:defRPr>
+            </a:pPr>
+            <a:r>
+              <a:t>Engineering Team Leadership</a:t>
+            </a:r>
+          </a:p>
+          <a:p>
+            <a:pPr>
+              <a:defRPr sz="1000" b="1">
+                <a:solidFill>
+                  <a:srgbClr val="10B981"/>
+                </a:solidFill>
+              </a:defRPr>
+            </a:pPr>
+            <a:r>
+              <a:t>Founding Team</a:t>
+            </a:r>
+          </a:p>
+          <a:p>
+            <a:pPr>
+              <a:spcBef>
+                <a:spcPts val="500"/>
+              </a:spcBef>
+              <a:defRPr sz="1150">
+                <a:solidFill>
+                  <a:srgbClr val="CBD5E1"/>
+                </a:solidFill>
+              </a:defRPr>
+            </a:pPr>
+            <a:r>
+              <a:t>•  Najimdeen Adam Oyeyemi</a:t>
+            </a:r>
+          </a:p>
+          <a:p>
+            <a:pPr>
+              <a:spcBef>
+                <a:spcPts val="500"/>
+              </a:spcBef>
+              <a:defRPr sz="1150">
+                <a:solidFill>
+                  <a:srgbClr val="CBD5E1"/>
+                </a:solidFill>
+              </a:defRPr>
+            </a:pPr>
+            <a:r>
+              <a:t>•  Role: Lead AI &amp; Financial Systems Architect</a:t>
+            </a:r>
+          </a:p>
+          <a:p>
+            <a:pPr>
+              <a:spcBef>
+                <a:spcPts val="500"/>
+              </a:spcBef>
+              <a:defRPr sz="1150">
+                <a:solidFill>
+                  <a:srgbClr val="CBD5E1"/>
+                </a:solidFill>
+              </a:defRPr>
+            </a:pPr>
+            <a:r>
+              <a:t>•  Engineered: Google Gemini 2.5 autonomous multi-doc analysis pipelines, adversarial circularization engine, and AAOIFI deterministic Shariah accounting modules.</a:t>
+            </a:r>
+          </a:p>
+          <a:p>
+            <a:pPr>
+              <a:spcBef>
+                <a:spcPts val="500"/>
+              </a:spcBef>
+              <a:defRPr sz="1150">
+                <a:solidFill>
+                  <a:srgbClr val="CBD5E1"/>
+                </a:solidFill>
+              </a:defRPr>
+            </a:pPr>
+            <a:r>
+              <a:t>•   </a:t>
+            </a:r>
+          </a:p>
+          <a:p>
+            <a:pPr>
+              <a:spcBef>
+                <a:spcPts val="500"/>
+              </a:spcBef>
+              <a:defRPr sz="1150">
+                <a:solidFill>
+                  <a:srgbClr val="CBD5E1"/>
+                </a:solidFill>
+              </a:defRPr>
+            </a:pPr>
+            <a:r>
+              <a:t>•  Olagunju Temitope</a:t>
+            </a:r>
+          </a:p>
+          <a:p>
+            <a:pPr>
+              <a:spcBef>
+                <a:spcPts val="500"/>
+              </a:spcBef>
+              <a:defRPr sz="1150">
+                <a:solidFill>
+                  <a:srgbClr val="CBD5E1"/>
+                </a:solidFill>
+              </a:defRPr>
+            </a:pPr>
+            <a:r>
+              <a:t>•  Role: Full-Stack &amp; Cloud Infrastructure Engineer</a:t>
+            </a:r>
+          </a:p>
+          <a:p>
+            <a:pPr>
+              <a:spcBef>
+                <a:spcPts val="500"/>
+              </a:spcBef>
+              <a:defRPr sz="1150">
+                <a:solidFill>
+                  <a:srgbClr val="CBD5E1"/>
+                </a:solidFill>
+              </a:defRPr>
+            </a:pPr>
+            <a:r>
+              <a:t>•  Engineered: High-availability FastAPI backend, cryptographic governance ledger, institutional React 19 UI, and production containerization on Railway &amp; Netlify.</a:t>
+            </a:r>
+          </a:p>
+        </p:txBody>
+      </p:sp>
+      <p:sp>
+        <p:nvSpPr>
+          <p:cNvPr id="7" name="Rounded Rectangle 6"/>
+          <p:cNvSpPr/>
+          <p:nvPr/>
+        </p:nvSpPr>
+        <p:spPr>
+          <a:xfrm>
+            <a:off x="6217920" y="1645920"/>
+            <a:ext cx="5120640" cy="4389120"/>
+          </a:xfrm>
+          <a:prstGeom prst="roundRect">
+            <a:avLst/>
+          </a:prstGeom>
+          <a:solidFill>
+            <a:srgbClr val="12192D"/>
+          </a:solidFill>
+          <a:ln w="19050">
+            <a:solidFill>
+              <a:srgbClr val="3B82F6"/>
+            </a:solidFill>
+          </a:ln>
+        </p:spPr>
+        <p:style>
+          <a:lnRef idx="1">
+            <a:schemeClr val="accent1"/>
+          </a:lnRef>
+          <a:fillRef idx="3">
+            <a:schemeClr val="accent1"/>
+          </a:fillRef>
+          <a:effectRef idx="2">
+            <a:schemeClr val="accent1"/>
+          </a:effectRef>
+          <a:fontRef idx="minor">
+            <a:schemeClr val="lt1"/>
+          </a:fontRef>
+        </p:style>
+        <p:txBody>
+          <a:bodyPr rtlCol="0" anchor="ctr"/>
+          <a:lstStyle/>
+          <a:p>
+            <a:pPr algn="ctr"/>
+          </a:p>
+        </p:txBody>
+      </p:sp>
+      <p:sp>
+        <p:nvSpPr>
+          <p:cNvPr id="8" name="TextBox 7"/>
+          <p:cNvSpPr txBox="1"/>
+          <p:nvPr/>
+        </p:nvSpPr>
+        <p:spPr>
+          <a:xfrm>
+            <a:off x="6400800" y="1783080"/>
+            <a:ext cx="4754880" cy="4114800"/>
+          </a:xfrm>
+          <a:prstGeom prst="rect">
+            <a:avLst/>
+          </a:prstGeom>
+          <a:noFill/>
+        </p:spPr>
+        <p:txBody>
+          <a:bodyPr wrap="square">
+            <a:spAutoFit/>
+          </a:bodyPr>
+          <a:lstStyle/>
+          <a:p>
+            <a:pPr>
+              <a:defRPr sz="1500" b="1">
+                <a:solidFill>
+                  <a:srgbClr val="FFFFFF"/>
+                </a:solidFill>
+              </a:defRPr>
+            </a:pPr>
+            <a:r>
+              <a:t>Enterprise Technology Stack</a:t>
+            </a:r>
+          </a:p>
+          <a:p>
+            <a:pPr>
+              <a:defRPr sz="1000" b="1">
+                <a:solidFill>
+                  <a:srgbClr val="3B82F6"/>
+                </a:solidFill>
+              </a:defRPr>
+            </a:pPr>
+            <a:r>
+              <a:t>Modular Architecture</a:t>
+            </a:r>
+          </a:p>
+          <a:p>
+            <a:pPr>
+              <a:spcBef>
+                <a:spcPts val="500"/>
+              </a:spcBef>
+              <a:defRPr sz="1150">
+                <a:solidFill>
+                  <a:srgbClr val="CBD5E1"/>
+                </a:solidFill>
+              </a:defRPr>
+            </a:pPr>
+            <a:r>
+              <a:t>•  Frontend Architecture:</a:t>
+            </a:r>
+          </a:p>
+          <a:p>
+            <a:pPr>
+              <a:spcBef>
+                <a:spcPts val="500"/>
+              </a:spcBef>
+              <a:defRPr sz="1150">
+                <a:solidFill>
+                  <a:srgbClr val="CBD5E1"/>
+                </a:solidFill>
+              </a:defRPr>
+            </a:pPr>
+            <a:r>
+              <a:t>•  React 19, TypeScript, Vite, Tailwind CSS, Lucide Icons, Recharts financial data visualization.</a:t>
+            </a:r>
+          </a:p>
+          <a:p>
+            <a:pPr>
+              <a:spcBef>
+                <a:spcPts val="500"/>
+              </a:spcBef>
+              <a:defRPr sz="1150">
+                <a:solidFill>
+                  <a:srgbClr val="CBD5E1"/>
+                </a:solidFill>
+              </a:defRPr>
+            </a:pPr>
+            <a:r>
+              <a:t>•  Backend &amp; Microservices:</a:t>
+            </a:r>
+          </a:p>
+          <a:p>
+            <a:pPr>
+              <a:spcBef>
+                <a:spcPts val="500"/>
+              </a:spcBef>
+              <a:defRPr sz="1150">
+                <a:solidFill>
+                  <a:srgbClr val="CBD5E1"/>
+                </a:solidFill>
+              </a:defRPr>
+            </a:pPr>
+            <a:r>
+              <a:t>•  Python 3.11, FastAPI, Uvicorn ASGI server, Pydantic schemas, python-docx, python-pptx, ReportLab.</a:t>
+            </a:r>
+          </a:p>
+          <a:p>
+            <a:pPr>
+              <a:spcBef>
+                <a:spcPts val="500"/>
+              </a:spcBef>
+              <a:defRPr sz="1150">
+                <a:solidFill>
+                  <a:srgbClr val="CBD5E1"/>
+                </a:solidFill>
+              </a:defRPr>
+            </a:pPr>
+            <a:r>
+              <a:t>•  AI &amp; Analytical Inference:</a:t>
+            </a:r>
+          </a:p>
+          <a:p>
+            <a:pPr>
+              <a:spcBef>
+                <a:spcPts val="500"/>
+              </a:spcBef>
+              <a:defRPr sz="1150">
+                <a:solidFill>
+                  <a:srgbClr val="CBD5E1"/>
+                </a:solidFill>
+              </a:defRPr>
+            </a:pPr>
+            <a:r>
+              <a:t>•  Google Gemini 2.5 Flash / Pro (multi-modal reasoning, unscripted document analysis, automated CAM synthesis).</a:t>
+            </a:r>
+          </a:p>
+          <a:p>
+            <a:pPr>
+              <a:spcBef>
+                <a:spcPts val="500"/>
+              </a:spcBef>
+              <a:defRPr sz="1150">
+                <a:solidFill>
+                  <a:srgbClr val="CBD5E1"/>
+                </a:solidFill>
+              </a:defRPr>
+            </a:pPr>
+            <a:r>
+              <a:t>•  Cloud &amp; Deployment Infrastructure:</a:t>
+            </a:r>
+          </a:p>
+          <a:p>
+            <a:pPr>
+              <a:spcBef>
+                <a:spcPts val="500"/>
+              </a:spcBef>
+              <a:defRPr sz="1150">
+                <a:solidFill>
+                  <a:srgbClr val="CBD5E1"/>
+                </a:solidFill>
+              </a:defRPr>
+            </a:pPr>
+            <a:r>
+              <a:t>•  Railway (Containerized Python API), Netlify (Global CDN Edge Web Hosting), Git / GitHub.</a:t>
+            </a:r>
+          </a:p>
+        </p:txBody>
+      </p:sp>
+    </p:spTree>
+  </p:cSld>
+  <p:clrMapOvr>
+    <a:masterClrMapping/>
+  </p:clrMapOvr>
+</p:sld>
+</file>
+
+<file path=ppt/slides/slide13.xml><?xml version="1.0" encoding="utf-8"?>
+<p:sld xmlns:a="http://schemas.openxmlformats.org/drawingml/2006/main" xmlns:p="http://schemas.openxmlformats.org/presentationml/2006/main" xmlns:r="http://schemas.openxmlformats.org/officeDocument/2006/relationships">
+  <p:cSld>
+    <p:spTree>
+      <p:nvGrpSpPr>
+        <p:cNvPr id="1" name=""/>
+        <p:cNvGrpSpPr/>
+        <p:nvPr/>
+      </p:nvGrpSpPr>
+      <p:grpSpPr/>
+      <p:sp>
+        <p:nvSpPr>
+          <p:cNvPr id="2" name="Rectangle 1"/>
+          <p:cNvSpPr/>
+          <p:nvPr/>
+        </p:nvSpPr>
+        <p:spPr>
+          <a:xfrm>
+            <a:off x="0" y="0"/>
+            <a:ext cx="12191695" cy="6858000"/>
+          </a:xfrm>
+          <a:prstGeom prst="rect">
+            <a:avLst/>
+          </a:prstGeom>
+          <a:solidFill>
+            <a:srgbClr val="0B0F19"/>
+          </a:solidFill>
+          <a:ln>
+            <a:noFill/>
+          </a:ln>
+        </p:spPr>
+        <p:style>
+          <a:lnRef idx="1">
+            <a:schemeClr val="accent1"/>
+          </a:lnRef>
+          <a:fillRef idx="3">
+            <a:schemeClr val="accent1"/>
+          </a:fillRef>
+          <a:effectRef idx="2">
+            <a:schemeClr val="accent1"/>
+          </a:effectRef>
+          <a:fontRef idx="minor">
+            <a:schemeClr val="lt1"/>
+          </a:fontRef>
+        </p:style>
+        <p:txBody>
+          <a:bodyPr rtlCol="0" anchor="ctr"/>
+          <a:lstStyle/>
+          <a:p>
+            <a:pPr algn="ctr"/>
+          </a:p>
+        </p:txBody>
+      </p:sp>
+      <p:sp>
+        <p:nvSpPr>
+          <p:cNvPr id="3" name="TextBox 2"/>
+          <p:cNvSpPr txBox="1"/>
+          <p:nvPr/>
+        </p:nvSpPr>
+        <p:spPr>
+          <a:xfrm>
+            <a:off x="731520" y="365760"/>
+            <a:ext cx="10058400" cy="365760"/>
+          </a:xfrm>
+          <a:prstGeom prst="rect">
+            <a:avLst/>
+          </a:prstGeom>
+          <a:noFill/>
+        </p:spPr>
+        <p:txBody>
+          <a:bodyPr wrap="square">
+            <a:spAutoFit/>
+          </a:bodyPr>
+          <a:lstStyle/>
+          <a:p>
+            <a:pPr>
+              <a:defRPr sz="1100" b="1">
+                <a:solidFill>
+                  <a:srgbClr val="3B82F6"/>
+                </a:solidFill>
+              </a:defRPr>
+            </a:pPr>
+            <a:r>
+              <a:t>WARBA BANK CORPORATE BANKING · TRACK 1</a:t>
+            </a:r>
+          </a:p>
+        </p:txBody>
+      </p:sp>
+      <p:sp>
+        <p:nvSpPr>
+          <p:cNvPr id="4" name="TextBox 3"/>
+          <p:cNvSpPr txBox="1"/>
+          <p:nvPr/>
+        </p:nvSpPr>
+        <p:spPr>
+          <a:xfrm>
+            <a:off x="731520" y="685800"/>
+            <a:ext cx="10515600" cy="731520"/>
+          </a:xfrm>
+          <a:prstGeom prst="rect">
+            <a:avLst/>
+          </a:prstGeom>
+          <a:noFill/>
+        </p:spPr>
+        <p:txBody>
+          <a:bodyPr wrap="square">
+            <a:spAutoFit/>
+          </a:bodyPr>
+          <a:lstStyle/>
+          <a:p>
+            <a:pPr>
+              <a:defRPr sz="2200" b="1">
+                <a:solidFill>
+                  <a:srgbClr val="FFFFFF"/>
+                </a:solidFill>
+              </a:defRPr>
+            </a:pPr>
+            <a:r>
+              <a:t>Production Readiness: Live Demo &amp; 60-Second Evaluation Protocol</a:t>
+            </a:r>
+          </a:p>
+        </p:txBody>
+      </p:sp>
+      <p:sp>
+        <p:nvSpPr>
+          <p:cNvPr id="5" name="Rounded Rectangle 4"/>
+          <p:cNvSpPr/>
+          <p:nvPr/>
+        </p:nvSpPr>
+        <p:spPr>
+          <a:xfrm>
+            <a:off x="731520" y="1645920"/>
+            <a:ext cx="10607040" cy="4389120"/>
+          </a:xfrm>
+          <a:prstGeom prst="roundRect">
+            <a:avLst/>
+          </a:prstGeom>
+          <a:solidFill>
+            <a:srgbClr val="12192D"/>
+          </a:solidFill>
+          <a:ln w="19050">
+            <a:solidFill>
+              <a:srgbClr val="10B981"/>
+            </a:solidFill>
+          </a:ln>
+        </p:spPr>
+        <p:style>
+          <a:lnRef idx="1">
+            <a:schemeClr val="accent1"/>
+          </a:lnRef>
+          <a:fillRef idx="3">
+            <a:schemeClr val="accent1"/>
+          </a:fillRef>
+          <a:effectRef idx="2">
+            <a:schemeClr val="accent1"/>
+          </a:effectRef>
+          <a:fontRef idx="minor">
+            <a:schemeClr val="lt1"/>
+          </a:fontRef>
+        </p:style>
+        <p:txBody>
+          <a:bodyPr rtlCol="0" anchor="ctr"/>
+          <a:lstStyle/>
+          <a:p>
+            <a:pPr algn="ctr"/>
+          </a:p>
+        </p:txBody>
+      </p:sp>
+      <p:sp>
+        <p:nvSpPr>
+          <p:cNvPr id="6" name="TextBox 5"/>
+          <p:cNvSpPr txBox="1"/>
+          <p:nvPr/>
+        </p:nvSpPr>
+        <p:spPr>
+          <a:xfrm>
+            <a:off x="914400" y="1783080"/>
+            <a:ext cx="10241280" cy="4114800"/>
+          </a:xfrm>
+          <a:prstGeom prst="rect">
+            <a:avLst/>
+          </a:prstGeom>
+          <a:noFill/>
+        </p:spPr>
+        <p:txBody>
+          <a:bodyPr wrap="square">
+            <a:spAutoFit/>
+          </a:bodyPr>
+          <a:lstStyle/>
+          <a:p>
+            <a:pPr>
+              <a:defRPr sz="1500" b="1">
+                <a:solidFill>
+                  <a:srgbClr val="FFFFFF"/>
+                </a:solidFill>
+              </a:defRPr>
+            </a:pPr>
+            <a:r>
+              <a:t>Test the Live Production Application Directly</a:t>
+            </a:r>
+          </a:p>
+          <a:p>
+            <a:pPr>
+              <a:defRPr sz="1000" b="1">
+                <a:solidFill>
+                  <a:srgbClr val="10B981"/>
+                </a:solidFill>
+              </a:defRPr>
+            </a:pPr>
+            <a:r>
+              <a:t>Live Evaluation Protocol</a:t>
+            </a:r>
+          </a:p>
+          <a:p>
+            <a:pPr>
+              <a:spcBef>
+                <a:spcPts val="500"/>
+              </a:spcBef>
+              <a:defRPr sz="1150">
+                <a:solidFill>
+                  <a:srgbClr val="CBD5E1"/>
+                </a:solidFill>
+              </a:defRPr>
+            </a:pPr>
+            <a:r>
+              <a:t>•  🌐 Live Production Web App: https://sanad-engine.netlify.app</a:t>
+            </a:r>
+          </a:p>
+          <a:p>
+            <a:pPr>
+              <a:spcBef>
+                <a:spcPts val="500"/>
+              </a:spcBef>
+              <a:defRPr sz="1150">
+                <a:solidFill>
+                  <a:srgbClr val="CBD5E1"/>
+                </a:solidFill>
+              </a:defRPr>
+            </a:pPr>
+            <a:r>
+              <a:t>•  ⚡ Live Backend API: https://sanad-production-9d51.up.railway.app</a:t>
+            </a:r>
+          </a:p>
+          <a:p>
+            <a:pPr>
+              <a:spcBef>
+                <a:spcPts val="500"/>
+              </a:spcBef>
+              <a:defRPr sz="1150">
+                <a:solidFill>
+                  <a:srgbClr val="CBD5E1"/>
+                </a:solidFill>
+              </a:defRPr>
+            </a:pPr>
+            <a:r>
+              <a:t>•  📂 GitHub Code Repository: https://github.com/anajimdeen01-debug/sanad-frontend</a:t>
+            </a:r>
+          </a:p>
+          <a:p>
+            <a:pPr>
+              <a:spcBef>
+                <a:spcPts val="500"/>
+              </a:spcBef>
+              <a:defRPr sz="1150">
+                <a:solidFill>
+                  <a:srgbClr val="CBD5E1"/>
+                </a:solidFill>
+              </a:defRPr>
+            </a:pPr>
+            <a:r>
+              <a:t>•  👥 Engineering Team: Najimdeen Adam Oyeyemi &amp; Olagunju Temitope</a:t>
+            </a:r>
+          </a:p>
+          <a:p>
+            <a:pPr>
+              <a:spcBef>
+                <a:spcPts val="500"/>
+              </a:spcBef>
+              <a:defRPr sz="1150">
+                <a:solidFill>
+                  <a:srgbClr val="CBD5E1"/>
+                </a:solidFill>
+              </a:defRPr>
+            </a:pPr>
+            <a:r>
+              <a:t>•   </a:t>
+            </a:r>
+          </a:p>
+          <a:p>
+            <a:pPr>
+              <a:spcBef>
+                <a:spcPts val="500"/>
+              </a:spcBef>
+              <a:defRPr sz="1150">
+                <a:solidFill>
+                  <a:srgbClr val="CBD5E1"/>
+                </a:solidFill>
+              </a:defRPr>
+            </a:pPr>
+            <a:r>
+              <a:t>•  STEP-BY-STEP EVALUATION GUIDE FOR JUDGES (60 SECONDS):</a:t>
+            </a:r>
+          </a:p>
+          <a:p>
+            <a:pPr>
+              <a:spcBef>
+                <a:spcPts val="500"/>
+              </a:spcBef>
+              <a:defRPr sz="1150">
+                <a:solidFill>
+                  <a:srgbClr val="CBD5E1"/>
+                </a:solidFill>
+              </a:defRPr>
+            </a:pPr>
+            <a:r>
+              <a:t>•  1. Open Gulf Pearl Foods Trading (CR #204918-KW) from the main directory.</a:t>
+            </a:r>
+          </a:p>
+          <a:p>
+            <a:pPr>
+              <a:spcBef>
+                <a:spcPts val="500"/>
+              </a:spcBef>
+              <a:defRPr sz="1150">
+                <a:solidFill>
+                  <a:srgbClr val="CBD5E1"/>
+                </a:solidFill>
+              </a:defRPr>
+            </a:pPr>
+            <a:r>
+              <a:t>•  2. Read the 4 AI Forensic Chapters authored dynamically by Google Gemini.</a:t>
+            </a:r>
+          </a:p>
+          <a:p>
+            <a:pPr>
+              <a:spcBef>
+                <a:spcPts val="500"/>
+              </a:spcBef>
+              <a:defRPr sz="1150">
+                <a:solidFill>
+                  <a:srgbClr val="CBD5E1"/>
+                </a:solidFill>
+              </a:defRPr>
+            </a:pPr>
+            <a:r>
+              <a:t>•  3. Click citation [#F-922: Undisclosed Bond] to inspect the document provenance modal.</a:t>
+            </a:r>
+          </a:p>
+          <a:p>
+            <a:pPr>
+              <a:spcBef>
+                <a:spcPts val="500"/>
+              </a:spcBef>
+              <a:defRPr sz="1150">
+                <a:solidFill>
+                  <a:srgbClr val="CBD5E1"/>
+                </a:solidFill>
+              </a:defRPr>
+            </a:pPr>
+            <a:r>
+              <a:t>•  4. Click '⚡ Re-Analyze with Gemini' to watch live unscripted reasoning in real-time.</a:t>
+            </a:r>
+          </a:p>
+          <a:p>
+            <a:pPr>
+              <a:spcBef>
+                <a:spcPts val="500"/>
+              </a:spcBef>
+              <a:defRPr sz="1150">
+                <a:solidFill>
+                  <a:srgbClr val="CBD5E1"/>
+                </a:solidFill>
+              </a:defRPr>
+            </a:pPr>
+            <a:r>
+              <a:t>•  5. Slide the Revenue Stress slider to -25% and observe real-time DSCR recalculation.</a:t>
+            </a:r>
+          </a:p>
+          <a:p>
+            <a:pPr>
+              <a:spcBef>
+                <a:spcPts val="500"/>
+              </a:spcBef>
+              <a:defRPr sz="1150">
+                <a:solidFill>
+                  <a:srgbClr val="CBD5E1"/>
+                </a:solidFill>
+              </a:defRPr>
+            </a:pPr>
+            <a:r>
+              <a:t>•  6. Switch to 'Client Documentation Studio' to inspect the CAM, Term Sheet, and RM Brief.</a:t>
+            </a:r>
+          </a:p>
+          <a:p>
+            <a:pPr>
+              <a:spcBef>
+                <a:spcPts val="500"/>
+              </a:spcBef>
+              <a:defRPr sz="1150">
+                <a:solidFill>
+                  <a:srgbClr val="CBD5E1"/>
+                </a:solidFill>
+              </a:defRPr>
+            </a:pPr>
+            <a:r>
+              <a:t>•  7. Click 'Sign as Analyst' and 'Sign as SCU' to record cryptographic governance endorsements.</a:t>
             </a:r>
           </a:p>
         </p:txBody>
@@ -3440,7 +5447,7 @@
               </a:defRPr>
             </a:pPr>
             <a:r>
-              <a:t>The Core Problem: The 11-Day Underwriting Bottleneck</a:t>
+              <a:t>The Core Problem: Anatomy of the 11-Day Underwriting Bottleneck</a:t>
             </a:r>
           </a:p>
         </p:txBody>
@@ -3525,7 +5532,7 @@
           </a:p>
           <a:p>
             <a:pPr>
-              <a:defRPr sz="1000">
+              <a:defRPr sz="1000" b="1">
                 <a:solidFill>
                   <a:srgbClr val="F59E0B"/>
                 </a:solidFill>
@@ -3538,46 +5545,46 @@
           <a:p>
             <a:pPr>
               <a:spcBef>
-                <a:spcPts val="600"/>
-              </a:spcBef>
-              <a:defRPr sz="1200">
-                <a:solidFill>
-                  <a:srgbClr val="CBD5E1"/>
-                </a:solidFill>
-              </a:defRPr>
-            </a:pPr>
-            <a:r>
-              <a:t>•  Relationship Managers spend 65% of working hours chasing 70+ pages of PDF filings.</a:t>
-            </a:r>
-          </a:p>
-          <a:p>
-            <a:pPr>
-              <a:spcBef>
-                <a:spcPts val="600"/>
-              </a:spcBef>
-              <a:defRPr sz="1200">
-                <a:solidFill>
-                  <a:srgbClr val="CBD5E1"/>
-                </a:solidFill>
-              </a:defRPr>
-            </a:pPr>
-            <a:r>
-              <a:t>•  Audited balance sheets, MOCI extracts, and letters reviewed in disjointed silos.</a:t>
-            </a:r>
-          </a:p>
-          <a:p>
-            <a:pPr>
-              <a:spcBef>
-                <a:spcPts val="600"/>
-              </a:spcBef>
-              <a:defRPr sz="1200">
-                <a:solidFill>
-                  <a:srgbClr val="CBD5E1"/>
-                </a:solidFill>
-              </a:defRPr>
-            </a:pPr>
-            <a:r>
-              <a:t>•  Creates 8–14 day turnaround delays where high-velocity clients are lost to rivals.</a:t>
+                <a:spcPts val="500"/>
+              </a:spcBef>
+              <a:defRPr sz="1150">
+                <a:solidFill>
+                  <a:srgbClr val="CBD5E1"/>
+                </a:solidFill>
+              </a:defRPr>
+            </a:pPr>
+            <a:r>
+              <a:t>•  Relationship Managers spend 65% of working hours chasing and reconciling 70+ pages of PDF filings.</a:t>
+            </a:r>
+          </a:p>
+          <a:p>
+            <a:pPr>
+              <a:spcBef>
+                <a:spcPts val="500"/>
+              </a:spcBef>
+              <a:defRPr sz="1150">
+                <a:solidFill>
+                  <a:srgbClr val="CBD5E1"/>
+                </a:solidFill>
+              </a:defRPr>
+            </a:pPr>
+            <a:r>
+              <a:t>•  Audited balance sheets, MOCI extracts, and letters reviewed across disjointed operational silos.</a:t>
+            </a:r>
+          </a:p>
+          <a:p>
+            <a:pPr>
+              <a:spcBef>
+                <a:spcPts val="500"/>
+              </a:spcBef>
+              <a:defRPr sz="1150">
+                <a:solidFill>
+                  <a:srgbClr val="CBD5E1"/>
+                </a:solidFill>
+              </a:defRPr>
+            </a:pPr>
+            <a:r>
+              <a:t>•  Creates 8–14 day turnaround delays where high-velocity corporate borrowers are poached by rivals.</a:t>
             </a:r>
           </a:p>
         </p:txBody>
@@ -3657,64 +5664,64 @@
               </a:defRPr>
             </a:pPr>
             <a:r>
-              <a:t>Hidden Liquidation Liens</a:t>
-            </a:r>
-          </a:p>
-          <a:p>
-            <a:pPr>
-              <a:defRPr sz="1000">
+              <a:t>Isolated OCR Blind Spots</a:t>
+            </a:r>
+          </a:p>
+          <a:p>
+            <a:pPr>
+              <a:defRPr sz="1000" b="1">
                 <a:solidFill>
                   <a:srgbClr val="EF4444"/>
                 </a:solidFill>
               </a:defRPr>
             </a:pPr>
             <a:r>
-              <a:t>Blind-Spot Risk</a:t>
-            </a:r>
-          </a:p>
-          <a:p>
-            <a:pPr>
-              <a:spcBef>
-                <a:spcPts val="600"/>
-              </a:spcBef>
-              <a:defRPr sz="1200">
-                <a:solidFill>
-                  <a:srgbClr val="CBD5E1"/>
-                </a:solidFill>
-              </a:defRPr>
-            </a:pPr>
-            <a:r>
-              <a:t>•  Conventional OCR tools analyze files in isolation without cross-checking.</a:t>
-            </a:r>
-          </a:p>
-          <a:p>
-            <a:pPr>
-              <a:spcBef>
-                <a:spcPts val="600"/>
-              </a:spcBef>
-              <a:defRPr sz="1200">
-                <a:solidFill>
-                  <a:srgbClr val="CBD5E1"/>
-                </a:solidFill>
-              </a:defRPr>
-            </a:pPr>
-            <a:r>
-              <a:t>•  Completely miss contradictions between application claims and court gazettes.</a:t>
-            </a:r>
-          </a:p>
-          <a:p>
-            <a:pPr>
-              <a:spcBef>
-                <a:spcPts val="600"/>
-              </a:spcBef>
-              <a:defRPr sz="1200">
-                <a:solidFill>
-                  <a:srgbClr val="CBD5E1"/>
-                </a:solidFill>
-              </a:defRPr>
-            </a:pPr>
-            <a:r>
-              <a:t>•  Undisclosed performance bonds and sister-company debentures slip through.</a:t>
+              <a:t>Hidden Liquidation Risk</a:t>
+            </a:r>
+          </a:p>
+          <a:p>
+            <a:pPr>
+              <a:spcBef>
+                <a:spcPts val="500"/>
+              </a:spcBef>
+              <a:defRPr sz="1150">
+                <a:solidFill>
+                  <a:srgbClr val="CBD5E1"/>
+                </a:solidFill>
+              </a:defRPr>
+            </a:pPr>
+            <a:r>
+              <a:t>•  Conventional OCR tools analyze files in isolation without multi-source circularization.</a:t>
+            </a:r>
+          </a:p>
+          <a:p>
+            <a:pPr>
+              <a:spcBef>
+                <a:spcPts val="500"/>
+              </a:spcBef>
+              <a:defRPr sz="1150">
+                <a:solidFill>
+                  <a:srgbClr val="CBD5E1"/>
+                </a:solidFill>
+              </a:defRPr>
+            </a:pPr>
+            <a:r>
+              <a:t>•  Completely miss contradictions between credit declarations and official court gazettes.</a:t>
+            </a:r>
+          </a:p>
+          <a:p>
+            <a:pPr>
+              <a:spcBef>
+                <a:spcPts val="500"/>
+              </a:spcBef>
+              <a:defRPr sz="1150">
+                <a:solidFill>
+                  <a:srgbClr val="CBD5E1"/>
+                </a:solidFill>
+              </a:defRPr>
+            </a:pPr>
+            <a:r>
+              <a:t>•  Undisclosed performance bonds and affiliate debentures slip into sanctioned facilities.</a:t>
             </a:r>
           </a:p>
         </p:txBody>
@@ -3799,7 +5806,7 @@
           </a:p>
           <a:p>
             <a:pPr>
-              <a:defRPr sz="1000">
+              <a:defRPr sz="1000" b="1">
                 <a:solidFill>
                   <a:srgbClr val="3B82F6"/>
                 </a:solidFill>
@@ -3812,24 +5819,24 @@
           <a:p>
             <a:pPr>
               <a:spcBef>
-                <a:spcPts val="600"/>
-              </a:spcBef>
-              <a:defRPr sz="1200">
-                <a:solidFill>
-                  <a:srgbClr val="CBD5E1"/>
-                </a:solidFill>
-              </a:defRPr>
-            </a:pPr>
-            <a:r>
-              <a:t>•  Shariah teams must manually comb line-by-line through 'Other Income' footnotes.</a:t>
-            </a:r>
-          </a:p>
-          <a:p>
-            <a:pPr>
-              <a:spcBef>
-                <a:spcPts val="600"/>
-              </a:spcBef>
-              <a:defRPr sz="1200">
+                <a:spcPts val="500"/>
+              </a:spcBef>
+              <a:defRPr sz="1150">
+                <a:solidFill>
+                  <a:srgbClr val="CBD5E1"/>
+                </a:solidFill>
+              </a:defRPr>
+            </a:pPr>
+            <a:r>
+              <a:t>•  Shariah teams must manually comb line-by-line through P&amp;L 'Other Income' footnotes.</a:t>
+            </a:r>
+          </a:p>
+          <a:p>
+            <a:pPr>
+              <a:spcBef>
+                <a:spcPts val="500"/>
+              </a:spcBef>
+              <a:defRPr sz="1150">
                 <a:solidFill>
                   <a:srgbClr val="CBD5E1"/>
                 </a:solidFill>
@@ -3842,9 +5849,9 @@
           <a:p>
             <a:pPr>
               <a:spcBef>
-                <a:spcPts val="600"/>
-              </a:spcBef>
-              <a:defRPr sz="1200">
+                <a:spcPts val="500"/>
+              </a:spcBef>
+              <a:defRPr sz="1150">
                 <a:solidFill>
                   <a:srgbClr val="CBD5E1"/>
                 </a:solidFill>
@@ -3982,7 +5989,7 @@
               </a:defRPr>
             </a:pPr>
             <a:r>
-              <a:t>SANAD Architecture: Autonomous Forensic Intelligence</a:t>
+              <a:t>System Architecture: End-to-End 5-Pillar Operating Engine</a:t>
             </a:r>
           </a:p>
         </p:txBody>
@@ -3996,7 +6003,7 @@
         <p:spPr>
           <a:xfrm>
             <a:off x="731520" y="1645920"/>
-            <a:ext cx="5120640" cy="4389120"/>
+            <a:ext cx="5120640" cy="2103120"/>
           </a:xfrm>
           <a:prstGeom prst="roundRect">
             <a:avLst/>
@@ -4041,7 +6048,7 @@
         <p:spPr>
           <a:xfrm>
             <a:off x="914400" y="1783080"/>
-            <a:ext cx="4754880" cy="4114800"/>
+            <a:ext cx="4754880" cy="1828800"/>
           </a:xfrm>
           <a:prstGeom prst="rect">
             <a:avLst/>
@@ -4062,64 +6069,64 @@
               </a:defRPr>
             </a:pPr>
             <a:r>
-              <a:t>1. Forensic Circularization</a:t>
-            </a:r>
-          </a:p>
-          <a:p>
-            <a:pPr>
-              <a:defRPr sz="1000">
+              <a:t>Pillar 1: Sovereign Ingestion &amp; Redaction</a:t>
+            </a:r>
+          </a:p>
+          <a:p>
+            <a:pPr>
+              <a:defRPr sz="1000" b="1">
                 <a:solidFill>
                   <a:srgbClr val="3B82F6"/>
                 </a:solidFill>
               </a:defRPr>
             </a:pPr>
             <a:r>
-              <a:t>Zero Document Isolation</a:t>
-            </a:r>
-          </a:p>
-          <a:p>
-            <a:pPr>
-              <a:spcBef>
-                <a:spcPts val="600"/>
-              </a:spcBef>
-              <a:defRPr sz="1200">
-                <a:solidFill>
-                  <a:srgbClr val="CBD5E1"/>
-                </a:solidFill>
-              </a:defRPr>
-            </a:pPr>
-            <a:r>
-              <a:t>•  Multi-Document Parser: Ingests audited financials, CiNet bureau reports, MOCI registry extracts, and PACI data simultaneously.</a:t>
-            </a:r>
-          </a:p>
-          <a:p>
-            <a:pPr>
-              <a:spcBef>
-                <a:spcPts val="600"/>
-              </a:spcBef>
-              <a:defRPr sz="1200">
-                <a:solidFill>
-                  <a:srgbClr val="CBD5E1"/>
-                </a:solidFill>
-              </a:defRPr>
-            </a:pPr>
-            <a:r>
-              <a:t>•  Adversarial Discrepancy Hunter: Cross-examines declarations against registry filings to uncover undisclosed liabilities.</a:t>
-            </a:r>
-          </a:p>
-          <a:p>
-            <a:pPr>
-              <a:spcBef>
-                <a:spcPts val="600"/>
-              </a:spcBef>
-              <a:defRPr sz="1200">
-                <a:solidFill>
-                  <a:srgbClr val="CBD5E1"/>
-                </a:solidFill>
-              </a:defRPr>
-            </a:pPr>
-            <a:r>
-              <a:t>•  Sovereign Redaction: Client PII sanitized in accordance with Central Bank of Kuwait (CBK) sovereign data rules.</a:t>
+              <a:t>Zero Data Leakage</a:t>
+            </a:r>
+          </a:p>
+          <a:p>
+            <a:pPr>
+              <a:spcBef>
+                <a:spcPts val="500"/>
+              </a:spcBef>
+              <a:defRPr sz="1150">
+                <a:solidFill>
+                  <a:srgbClr val="CBD5E1"/>
+                </a:solidFill>
+              </a:defRPr>
+            </a:pPr>
+            <a:r>
+              <a:t>•  Multi-file ingestion (PDF, Word, Excel, scanned tables).</a:t>
+            </a:r>
+          </a:p>
+          <a:p>
+            <a:pPr>
+              <a:spcBef>
+                <a:spcPts val="500"/>
+              </a:spcBef>
+              <a:defRPr sz="1150">
+                <a:solidFill>
+                  <a:srgbClr val="CBD5E1"/>
+                </a:solidFill>
+              </a:defRPr>
+            </a:pPr>
+            <a:r>
+              <a:t>•  On-premise regex &amp; NER redactor strips Kuwait Civil IDs and PII.</a:t>
+            </a:r>
+          </a:p>
+          <a:p>
+            <a:pPr>
+              <a:spcBef>
+                <a:spcPts val="500"/>
+              </a:spcBef>
+              <a:defRPr sz="1150">
+                <a:solidFill>
+                  <a:srgbClr val="CBD5E1"/>
+                </a:solidFill>
+              </a:defRPr>
+            </a:pPr>
+            <a:r>
+              <a:t>•  Ensures 100% compliance with CBK data sovereignty rules.</a:t>
             </a:r>
           </a:p>
         </p:txBody>
@@ -4133,7 +6140,144 @@
         <p:spPr>
           <a:xfrm>
             <a:off x="6217920" y="1645920"/>
-            <a:ext cx="5120640" cy="4389120"/>
+            <a:ext cx="5120640" cy="2103120"/>
+          </a:xfrm>
+          <a:prstGeom prst="roundRect">
+            <a:avLst/>
+          </a:prstGeom>
+          <a:solidFill>
+            <a:srgbClr val="12192D"/>
+          </a:solidFill>
+          <a:ln w="19050">
+            <a:solidFill>
+              <a:srgbClr val="EF4444"/>
+            </a:solidFill>
+          </a:ln>
+        </p:spPr>
+        <p:style>
+          <a:lnRef idx="1">
+            <a:schemeClr val="accent1"/>
+          </a:lnRef>
+          <a:fillRef idx="3">
+            <a:schemeClr val="accent1"/>
+          </a:fillRef>
+          <a:effectRef idx="2">
+            <a:schemeClr val="accent1"/>
+          </a:effectRef>
+          <a:fontRef idx="minor">
+            <a:schemeClr val="lt1"/>
+          </a:fontRef>
+        </p:style>
+        <p:txBody>
+          <a:bodyPr rtlCol="0" anchor="ctr"/>
+          <a:lstStyle/>
+          <a:p>
+            <a:pPr algn="ctr"/>
+          </a:p>
+        </p:txBody>
+      </p:sp>
+      <p:sp>
+        <p:nvSpPr>
+          <p:cNvPr id="8" name="TextBox 7"/>
+          <p:cNvSpPr txBox="1"/>
+          <p:nvPr/>
+        </p:nvSpPr>
+        <p:spPr>
+          <a:xfrm>
+            <a:off x="6400800" y="1783080"/>
+            <a:ext cx="4754880" cy="1828800"/>
+          </a:xfrm>
+          <a:prstGeom prst="rect">
+            <a:avLst/>
+          </a:prstGeom>
+          <a:noFill/>
+        </p:spPr>
+        <p:txBody>
+          <a:bodyPr wrap="square">
+            <a:spAutoFit/>
+          </a:bodyPr>
+          <a:lstStyle/>
+          <a:p>
+            <a:pPr>
+              <a:defRPr sz="1500" b="1">
+                <a:solidFill>
+                  <a:srgbClr val="FFFFFF"/>
+                </a:solidFill>
+              </a:defRPr>
+            </a:pPr>
+            <a:r>
+              <a:t>Pillar 2: Adversarial Circularization</a:t>
+            </a:r>
+          </a:p>
+          <a:p>
+            <a:pPr>
+              <a:defRPr sz="1000" b="1">
+                <a:solidFill>
+                  <a:srgbClr val="EF4444"/>
+                </a:solidFill>
+              </a:defRPr>
+            </a:pPr>
+            <a:r>
+              <a:t>Discrepancy Hunter</a:t>
+            </a:r>
+          </a:p>
+          <a:p>
+            <a:pPr>
+              <a:spcBef>
+                <a:spcPts val="500"/>
+              </a:spcBef>
+              <a:defRPr sz="1150">
+                <a:solidFill>
+                  <a:srgbClr val="CBD5E1"/>
+                </a:solidFill>
+              </a:defRPr>
+            </a:pPr>
+            <a:r>
+              <a:t>•  Cross-examines applicant claims against external registers.</a:t>
+            </a:r>
+          </a:p>
+          <a:p>
+            <a:pPr>
+              <a:spcBef>
+                <a:spcPts val="500"/>
+              </a:spcBef>
+              <a:defRPr sz="1150">
+                <a:solidFill>
+                  <a:srgbClr val="CBD5E1"/>
+                </a:solidFill>
+              </a:defRPr>
+            </a:pPr>
+            <a:r>
+              <a:t>•  Integrates MOCI Commercial Registry &amp; CiNet Credit Bureau.</a:t>
+            </a:r>
+          </a:p>
+          <a:p>
+            <a:pPr>
+              <a:spcBef>
+                <a:spcPts val="500"/>
+              </a:spcBef>
+              <a:defRPr sz="1150">
+                <a:solidFill>
+                  <a:srgbClr val="CBD5E1"/>
+                </a:solidFill>
+              </a:defRPr>
+            </a:pPr>
+            <a:r>
+              <a:t>•  Surfaces undisclosed guarantees &amp; conflicting encumbrances.</a:t>
+            </a:r>
+          </a:p>
+        </p:txBody>
+      </p:sp>
+      <p:sp>
+        <p:nvSpPr>
+          <p:cNvPr id="9" name="Rounded Rectangle 8"/>
+          <p:cNvSpPr/>
+          <p:nvPr/>
+        </p:nvSpPr>
+        <p:spPr>
+          <a:xfrm>
+            <a:off x="731520" y="4023360"/>
+            <a:ext cx="5120640" cy="2103120"/>
           </a:xfrm>
           <a:prstGeom prst="roundRect">
             <a:avLst/>
@@ -4171,14 +6315,14 @@
       </p:sp>
       <p:sp>
         <p:nvSpPr>
-          <p:cNvPr id="8" name="TextBox 7"/>
+          <p:cNvPr id="10" name="TextBox 9"/>
           <p:cNvSpPr txBox="1"/>
           <p:nvPr/>
         </p:nvSpPr>
         <p:spPr>
           <a:xfrm>
-            <a:off x="6400800" y="1783080"/>
-            <a:ext cx="4754880" cy="4114800"/>
+            <a:off x="914400" y="4160520"/>
+            <a:ext cx="4754880" cy="1828800"/>
           </a:xfrm>
           <a:prstGeom prst="rect">
             <a:avLst/>
@@ -4199,64 +6343,201 @@
               </a:defRPr>
             </a:pPr>
             <a:r>
-              <a:t>2. Shariah &amp; Financial Core</a:t>
-            </a:r>
-          </a:p>
-          <a:p>
-            <a:pPr>
-              <a:defRPr sz="1000">
+              <a:t>Pillar 3: AAOIFI Shariah Core</a:t>
+            </a:r>
+          </a:p>
+          <a:p>
+            <a:pPr>
+              <a:defRPr sz="1000" b="1">
                 <a:solidFill>
                   <a:srgbClr val="10B981"/>
                 </a:solidFill>
               </a:defRPr>
             </a:pPr>
             <a:r>
-              <a:t>Automated Compliance</a:t>
-            </a:r>
-          </a:p>
-          <a:p>
-            <a:pPr>
-              <a:spcBef>
-                <a:spcPts val="600"/>
-              </a:spcBef>
-              <a:defRPr sz="1200">
-                <a:solidFill>
-                  <a:srgbClr val="CBD5E1"/>
-                </a:solidFill>
-              </a:defRPr>
-            </a:pPr>
-            <a:r>
-              <a:t>•  AAOIFI Standard No. 21 Engine: Automatically calculates non-halal income ratio (&lt;5% ceiling) and debt-to-assets ratio (&lt;30% ceiling).</a:t>
-            </a:r>
-          </a:p>
-          <a:p>
-            <a:pPr>
-              <a:spcBef>
-                <a:spcPts val="600"/>
-              </a:spcBef>
-              <a:defRPr sz="1200">
-                <a:solidFill>
-                  <a:srgbClr val="CBD5E1"/>
-                </a:solidFill>
-              </a:defRPr>
-            </a:pPr>
-            <a:r>
-              <a:t>•  Taharah Cleansing Mandate: Calculates exact dividend purification down to the fil and drafts Bait Al-Zakat remittance transfer order.</a:t>
-            </a:r>
-          </a:p>
-          <a:p>
-            <a:pPr>
-              <a:spcBef>
-                <a:spcPts val="600"/>
-              </a:spcBef>
-              <a:defRPr sz="1200">
-                <a:solidFill>
-                  <a:srgbClr val="CBD5E1"/>
-                </a:solidFill>
-              </a:defRPr>
-            </a:pPr>
-            <a:r>
-              <a:t>•  Covenant Stress Simulator: Monte Carlo stress testing under -25% revenue downturns and +150 bps discount rate hikes.</a:t>
+              <a:t>Deterministic Purification</a:t>
+            </a:r>
+          </a:p>
+          <a:p>
+            <a:pPr>
+              <a:spcBef>
+                <a:spcPts val="500"/>
+              </a:spcBef>
+              <a:defRPr sz="1150">
+                <a:solidFill>
+                  <a:srgbClr val="CBD5E1"/>
+                </a:solidFill>
+              </a:defRPr>
+            </a:pPr>
+            <a:r>
+              <a:t>•  Automated screening under AAOIFI Standard No. 21 (&lt;5% income).</a:t>
+            </a:r>
+          </a:p>
+          <a:p>
+            <a:pPr>
+              <a:spcBef>
+                <a:spcPts val="500"/>
+              </a:spcBef>
+              <a:defRPr sz="1150">
+                <a:solidFill>
+                  <a:srgbClr val="CBD5E1"/>
+                </a:solidFill>
+              </a:defRPr>
+            </a:pPr>
+            <a:r>
+              <a:t>•  Calculates exact Taharah purification dividend down to the fil.</a:t>
+            </a:r>
+          </a:p>
+          <a:p>
+            <a:pPr>
+              <a:spcBef>
+                <a:spcPts val="500"/>
+              </a:spcBef>
+              <a:defRPr sz="1150">
+                <a:solidFill>
+                  <a:srgbClr val="CBD5E1"/>
+                </a:solidFill>
+              </a:defRPr>
+            </a:pPr>
+            <a:r>
+              <a:t>•  Pre-drafts electronic transfer voucher to Bait Al-Zakat Kuwait.</a:t>
+            </a:r>
+          </a:p>
+        </p:txBody>
+      </p:sp>
+      <p:sp>
+        <p:nvSpPr>
+          <p:cNvPr id="11" name="Rounded Rectangle 10"/>
+          <p:cNvSpPr/>
+          <p:nvPr/>
+        </p:nvSpPr>
+        <p:spPr>
+          <a:xfrm>
+            <a:off x="6217920" y="4023360"/>
+            <a:ext cx="5120640" cy="2103120"/>
+          </a:xfrm>
+          <a:prstGeom prst="roundRect">
+            <a:avLst/>
+          </a:prstGeom>
+          <a:solidFill>
+            <a:srgbClr val="12192D"/>
+          </a:solidFill>
+          <a:ln w="19050">
+            <a:solidFill>
+              <a:srgbClr val="A855F7"/>
+            </a:solidFill>
+          </a:ln>
+        </p:spPr>
+        <p:style>
+          <a:lnRef idx="1">
+            <a:schemeClr val="accent1"/>
+          </a:lnRef>
+          <a:fillRef idx="3">
+            <a:schemeClr val="accent1"/>
+          </a:fillRef>
+          <a:effectRef idx="2">
+            <a:schemeClr val="accent1"/>
+          </a:effectRef>
+          <a:fontRef idx="minor">
+            <a:schemeClr val="lt1"/>
+          </a:fontRef>
+        </p:style>
+        <p:txBody>
+          <a:bodyPr rtlCol="0" anchor="ctr"/>
+          <a:lstStyle/>
+          <a:p>
+            <a:pPr algn="ctr"/>
+          </a:p>
+        </p:txBody>
+      </p:sp>
+      <p:sp>
+        <p:nvSpPr>
+          <p:cNvPr id="12" name="TextBox 11"/>
+          <p:cNvSpPr txBox="1"/>
+          <p:nvPr/>
+        </p:nvSpPr>
+        <p:spPr>
+          <a:xfrm>
+            <a:off x="6400800" y="4160520"/>
+            <a:ext cx="4754880" cy="1828800"/>
+          </a:xfrm>
+          <a:prstGeom prst="rect">
+            <a:avLst/>
+          </a:prstGeom>
+          <a:noFill/>
+        </p:spPr>
+        <p:txBody>
+          <a:bodyPr wrap="square">
+            <a:spAutoFit/>
+          </a:bodyPr>
+          <a:lstStyle/>
+          <a:p>
+            <a:pPr>
+              <a:defRPr sz="1500" b="1">
+                <a:solidFill>
+                  <a:srgbClr val="FFFFFF"/>
+                </a:solidFill>
+              </a:defRPr>
+            </a:pPr>
+            <a:r>
+              <a:t>Pillar 4 &amp; 5: Documentation &amp; RM Radar</a:t>
+            </a:r>
+          </a:p>
+          <a:p>
+            <a:pPr>
+              <a:defRPr sz="1000" b="1">
+                <a:solidFill>
+                  <a:srgbClr val="A855F7"/>
+                </a:solidFill>
+              </a:defRPr>
+            </a:pPr>
+            <a:r>
+              <a:t>Front-Office Enabler</a:t>
+            </a:r>
+          </a:p>
+          <a:p>
+            <a:pPr>
+              <a:spcBef>
+                <a:spcPts val="500"/>
+              </a:spcBef>
+              <a:defRPr sz="1150">
+                <a:solidFill>
+                  <a:srgbClr val="CBD5E1"/>
+                </a:solidFill>
+              </a:defRPr>
+            </a:pPr>
+            <a:r>
+              <a:t>•  Client Documentation Studio: Auto-generates CAM, Term Sheet, RM Brief.</a:t>
+            </a:r>
+          </a:p>
+          <a:p>
+            <a:pPr>
+              <a:spcBef>
+                <a:spcPts val="500"/>
+              </a:spcBef>
+              <a:defRPr sz="1150">
+                <a:solidFill>
+                  <a:srgbClr val="CBD5E1"/>
+                </a:solidFill>
+              </a:defRPr>
+            </a:pPr>
+            <a:r>
+              <a:t>•  Live Covenant Stress: -25% revenue shock &amp; +150 bps rate simulations.</a:t>
+            </a:r>
+          </a:p>
+          <a:p>
+            <a:pPr>
+              <a:spcBef>
+                <a:spcPts val="500"/>
+              </a:spcBef>
+              <a:defRPr sz="1150">
+                <a:solidFill>
+                  <a:srgbClr val="CBD5E1"/>
+                </a:solidFill>
+              </a:defRPr>
+            </a:pPr>
+            <a:r>
+              <a:t>•  Proactive RM Radar: Uncovers +KWD 700k expansion opportunities.</a:t>
             </a:r>
           </a:p>
         </p:txBody>
@@ -4387,7 +6668,7 @@
               </a:defRPr>
             </a:pPr>
             <a:r>
-              <a:t>Track 1 Deliverable: Client Documentation Studio</a:t>
+              <a:t>Pillar 1: Sovereign Data Redaction &amp; Ingestion Pipeline</a:t>
             </a:r>
           </a:p>
         </p:txBody>
@@ -4401,7 +6682,7 @@
         <p:spPr>
           <a:xfrm>
             <a:off x="731520" y="1645920"/>
-            <a:ext cx="2468880" cy="4389120"/>
+            <a:ext cx="5120640" cy="4389120"/>
           </a:xfrm>
           <a:prstGeom prst="roundRect">
             <a:avLst/>
@@ -4446,7 +6727,7 @@
         <p:spPr>
           <a:xfrm>
             <a:off x="914400" y="1783080"/>
-            <a:ext cx="2103120" cy="4114800"/>
+            <a:ext cx="4754880" cy="4114800"/>
           </a:xfrm>
           <a:prstGeom prst="rect">
             <a:avLst/>
@@ -4467,64 +6748,64 @@
               </a:defRPr>
             </a:pPr>
             <a:r>
-              <a:t>Credit Memo (CAM)</a:t>
-            </a:r>
-          </a:p>
-          <a:p>
-            <a:pPr>
-              <a:defRPr sz="1000">
+              <a:t>How Ingestion Operates</a:t>
+            </a:r>
+          </a:p>
+          <a:p>
+            <a:pPr>
+              <a:defRPr sz="1000" b="1">
                 <a:solidFill>
                   <a:srgbClr val="3B82F6"/>
                 </a:solidFill>
               </a:defRPr>
             </a:pPr>
             <a:r>
-              <a:t>Official Banking Template</a:t>
-            </a:r>
-          </a:p>
-          <a:p>
-            <a:pPr>
-              <a:spcBef>
-                <a:spcPts val="600"/>
-              </a:spcBef>
-              <a:defRPr sz="1200">
-                <a:solidFill>
-                  <a:srgbClr val="CBD5E1"/>
-                </a:solidFill>
-              </a:defRPr>
-            </a:pPr>
-            <a:r>
-              <a:t>•  Warba Bank official executive memorandum format.</a:t>
-            </a:r>
-          </a:p>
-          <a:p>
-            <a:pPr>
-              <a:spcBef>
-                <a:spcPts val="600"/>
-              </a:spcBef>
-              <a:defRPr sz="1200">
-                <a:solidFill>
-                  <a:srgbClr val="CBD5E1"/>
-                </a:solidFill>
-              </a:defRPr>
-            </a:pPr>
-            <a:r>
-              <a:t>•  Comprehensive borrower appraisal, revenue velocity, and debt coverage.</a:t>
-            </a:r>
-          </a:p>
-          <a:p>
-            <a:pPr>
-              <a:spcBef>
-                <a:spcPts val="600"/>
-              </a:spcBef>
-              <a:defRPr sz="1200">
-                <a:solidFill>
-                  <a:srgbClr val="CBD5E1"/>
-                </a:solidFill>
-              </a:defRPr>
-            </a:pPr>
-            <a:r>
-              <a:t>•  Verbatim page citations with SHA-256 grounding hashes.</a:t>
+              <a:t>Universal Input Layer</a:t>
+            </a:r>
+          </a:p>
+          <a:p>
+            <a:pPr>
+              <a:spcBef>
+                <a:spcPts val="500"/>
+              </a:spcBef>
+              <a:defRPr sz="1150">
+                <a:solidFill>
+                  <a:srgbClr val="CBD5E1"/>
+                </a:solidFill>
+              </a:defRPr>
+            </a:pPr>
+            <a:r>
+              <a:t>•  Multi-Format Parser: Handles PDF scans, Excel financial models, Word charters, and MOCI extracts concurrently.</a:t>
+            </a:r>
+          </a:p>
+          <a:p>
+            <a:pPr>
+              <a:spcBef>
+                <a:spcPts val="500"/>
+              </a:spcBef>
+              <a:defRPr sz="1150">
+                <a:solidFill>
+                  <a:srgbClr val="CBD5E1"/>
+                </a:solidFill>
+              </a:defRPr>
+            </a:pPr>
+            <a:r>
+              <a:t>•  Instant CR Intake: Relationship Managers can enter a Kuwait Commercial Registration number (e.g. 204918-KW) to immediately pull pre-circularized telemetry.</a:t>
+            </a:r>
+          </a:p>
+          <a:p>
+            <a:pPr>
+              <a:spcBef>
+                <a:spcPts val="500"/>
+              </a:spcBef>
+              <a:defRPr sz="1150">
+                <a:solidFill>
+                  <a:srgbClr val="CBD5E1"/>
+                </a:solidFill>
+              </a:defRPr>
+            </a:pPr>
+            <a:r>
+              <a:t>•  Table Structure Preservation: Accurately parses multi-period balance sheets, cash flow schedules, and footnote notes without losing column hierarchy.</a:t>
             </a:r>
           </a:p>
         </p:txBody>
@@ -4537,8 +6818,8 @@
         </p:nvSpPr>
         <p:spPr>
           <a:xfrm>
-            <a:off x="3474720" y="1645920"/>
-            <a:ext cx="2468880" cy="4389120"/>
+            <a:off x="6217920" y="1645920"/>
+            <a:ext cx="5120640" cy="4389120"/>
           </a:xfrm>
           <a:prstGeom prst="roundRect">
             <a:avLst/>
@@ -4582,8 +6863,8 @@
         </p:nvSpPr>
         <p:spPr>
           <a:xfrm>
-            <a:off x="3657600" y="1783080"/>
-            <a:ext cx="2103120" cy="4114800"/>
+            <a:off x="6400800" y="1783080"/>
+            <a:ext cx="4754880" cy="4114800"/>
           </a:xfrm>
           <a:prstGeom prst="rect">
             <a:avLst/>
@@ -4604,338 +6885,64 @@
               </a:defRPr>
             </a:pPr>
             <a:r>
-              <a:t>Murabaha Term Sheet</a:t>
-            </a:r>
-          </a:p>
-          <a:p>
-            <a:pPr>
-              <a:defRPr sz="1000">
+              <a:t>CBK Sovereign Privacy Shield (Why Unique)</a:t>
+            </a:r>
+          </a:p>
+          <a:p>
+            <a:pPr>
+              <a:defRPr sz="1000" b="1">
                 <a:solidFill>
                   <a:srgbClr val="10B981"/>
                 </a:solidFill>
               </a:defRPr>
             </a:pPr>
             <a:r>
-              <a:t>Financing Agreement</a:t>
-            </a:r>
-          </a:p>
-          <a:p>
-            <a:pPr>
-              <a:spcBef>
-                <a:spcPts val="600"/>
-              </a:spcBef>
-              <a:defRPr sz="1200">
-                <a:solidFill>
-                  <a:srgbClr val="CBD5E1"/>
-                </a:solidFill>
-              </a:defRPr>
-            </a:pPr>
-            <a:r>
-              <a:t>•  Binding facility structure (Commodity Murabaha / Tawarruq).</a:t>
-            </a:r>
-          </a:p>
-          <a:p>
-            <a:pPr>
-              <a:spcBef>
-                <a:spcPts val="600"/>
-              </a:spcBef>
-              <a:defRPr sz="1200">
-                <a:solidFill>
-                  <a:srgbClr val="CBD5E1"/>
-                </a:solidFill>
-              </a:defRPr>
-            </a:pPr>
-            <a:r>
-              <a:t>•  Automated margin pricing: CBK Discount Rate + 2.25% p.a.</a:t>
-            </a:r>
-          </a:p>
-          <a:p>
-            <a:pPr>
-              <a:spcBef>
-                <a:spcPts val="600"/>
-              </a:spcBef>
-              <a:defRPr sz="1200">
-                <a:solidFill>
-                  <a:srgbClr val="CBD5E1"/>
-                </a:solidFill>
-              </a:defRPr>
-            </a:pPr>
-            <a:r>
-              <a:t>•  Covenants: Min 1.25x DSCR &amp; registered first-degree lien.</a:t>
-            </a:r>
-          </a:p>
-        </p:txBody>
-      </p:sp>
-      <p:sp>
-        <p:nvSpPr>
-          <p:cNvPr id="9" name="Rounded Rectangle 8"/>
-          <p:cNvSpPr/>
-          <p:nvPr/>
-        </p:nvSpPr>
-        <p:spPr>
-          <a:xfrm>
-            <a:off x="6217920" y="1645920"/>
-            <a:ext cx="2468880" cy="4389120"/>
-          </a:xfrm>
-          <a:prstGeom prst="roundRect">
-            <a:avLst/>
-          </a:prstGeom>
-          <a:solidFill>
-            <a:srgbClr val="12192D"/>
-          </a:solidFill>
-          <a:ln w="19050">
-            <a:solidFill>
-              <a:srgbClr val="F59E0B"/>
-            </a:solidFill>
-          </a:ln>
-        </p:spPr>
-        <p:style>
-          <a:lnRef idx="1">
-            <a:schemeClr val="accent1"/>
-          </a:lnRef>
-          <a:fillRef idx="3">
-            <a:schemeClr val="accent1"/>
-          </a:fillRef>
-          <a:effectRef idx="2">
-            <a:schemeClr val="accent1"/>
-          </a:effectRef>
-          <a:fontRef idx="minor">
-            <a:schemeClr val="lt1"/>
-          </a:fontRef>
-        </p:style>
-        <p:txBody>
-          <a:bodyPr rtlCol="0" anchor="ctr"/>
-          <a:lstStyle/>
-          <a:p>
-            <a:pPr algn="ctr"/>
-          </a:p>
-        </p:txBody>
-      </p:sp>
-      <p:sp>
-        <p:nvSpPr>
-          <p:cNvPr id="10" name="TextBox 9"/>
-          <p:cNvSpPr txBox="1"/>
-          <p:nvPr/>
-        </p:nvSpPr>
-        <p:spPr>
-          <a:xfrm>
-            <a:off x="6400800" y="1783080"/>
-            <a:ext cx="2103120" cy="4114800"/>
-          </a:xfrm>
-          <a:prstGeom prst="rect">
-            <a:avLst/>
-          </a:prstGeom>
-          <a:noFill/>
-        </p:spPr>
-        <p:txBody>
-          <a:bodyPr wrap="square">
-            <a:spAutoFit/>
-          </a:bodyPr>
-          <a:lstStyle/>
-          <a:p>
-            <a:pPr>
-              <a:defRPr sz="1500" b="1">
-                <a:solidFill>
-                  <a:srgbClr val="FFFFFF"/>
-                </a:solidFill>
-              </a:defRPr>
-            </a:pPr>
-            <a:r>
-              <a:t>RM Executive Brief</a:t>
-            </a:r>
-          </a:p>
-          <a:p>
-            <a:pPr>
-              <a:defRPr sz="1000">
-                <a:solidFill>
-                  <a:srgbClr val="F59E0B"/>
-                </a:solidFill>
-              </a:defRPr>
-            </a:pPr>
-            <a:r>
-              <a:t>Front-Office Enabler</a:t>
-            </a:r>
-          </a:p>
-          <a:p>
-            <a:pPr>
-              <a:spcBef>
-                <a:spcPts val="600"/>
-              </a:spcBef>
-              <a:defRPr sz="1200">
-                <a:solidFill>
-                  <a:srgbClr val="CBD5E1"/>
-                </a:solidFill>
-              </a:defRPr>
-            </a:pPr>
-            <a:r>
-              <a:t>•  1-page relationship manager cheat-sheet.</a:t>
-            </a:r>
-          </a:p>
-          <a:p>
-            <a:pPr>
-              <a:spcBef>
-                <a:spcPts val="600"/>
-              </a:spcBef>
-              <a:defRPr sz="1200">
-                <a:solidFill>
-                  <a:srgbClr val="CBD5E1"/>
-                </a:solidFill>
-              </a:defRPr>
-            </a:pPr>
-            <a:r>
-              <a:t>•  Talking points on client strengths, working capital cycle, and expansion.</a:t>
-            </a:r>
-          </a:p>
-          <a:p>
-            <a:pPr>
-              <a:spcBef>
-                <a:spcPts val="600"/>
-              </a:spcBef>
-              <a:defRPr sz="1200">
-                <a:solidFill>
-                  <a:srgbClr val="CBD5E1"/>
-                </a:solidFill>
-              </a:defRPr>
-            </a:pPr>
-            <a:r>
-              <a:t>•  Up-sell triggers: KWD 700k expansion &amp; LC trade finance.</a:t>
-            </a:r>
-          </a:p>
-        </p:txBody>
-      </p:sp>
-      <p:sp>
-        <p:nvSpPr>
-          <p:cNvPr id="11" name="Rounded Rectangle 10"/>
-          <p:cNvSpPr/>
-          <p:nvPr/>
-        </p:nvSpPr>
-        <p:spPr>
-          <a:xfrm>
-            <a:off x="8961120" y="1645920"/>
-            <a:ext cx="2468880" cy="4389120"/>
-          </a:xfrm>
-          <a:prstGeom prst="roundRect">
-            <a:avLst/>
-          </a:prstGeom>
-          <a:solidFill>
-            <a:srgbClr val="12192D"/>
-          </a:solidFill>
-          <a:ln w="19050">
-            <a:solidFill>
-              <a:srgbClr val="A855F7"/>
-            </a:solidFill>
-          </a:ln>
-        </p:spPr>
-        <p:style>
-          <a:lnRef idx="1">
-            <a:schemeClr val="accent1"/>
-          </a:lnRef>
-          <a:fillRef idx="3">
-            <a:schemeClr val="accent1"/>
-          </a:fillRef>
-          <a:effectRef idx="2">
-            <a:schemeClr val="accent1"/>
-          </a:effectRef>
-          <a:fontRef idx="minor">
-            <a:schemeClr val="lt1"/>
-          </a:fontRef>
-        </p:style>
-        <p:txBody>
-          <a:bodyPr rtlCol="0" anchor="ctr"/>
-          <a:lstStyle/>
-          <a:p>
-            <a:pPr algn="ctr"/>
-          </a:p>
-        </p:txBody>
-      </p:sp>
-      <p:sp>
-        <p:nvSpPr>
-          <p:cNvPr id="12" name="TextBox 11"/>
-          <p:cNvSpPr txBox="1"/>
-          <p:nvPr/>
-        </p:nvSpPr>
-        <p:spPr>
-          <a:xfrm>
-            <a:off x="9144000" y="1783080"/>
-            <a:ext cx="2103120" cy="4114800"/>
-          </a:xfrm>
-          <a:prstGeom prst="rect">
-            <a:avLst/>
-          </a:prstGeom>
-          <a:noFill/>
-        </p:spPr>
-        <p:txBody>
-          <a:bodyPr wrap="square">
-            <a:spAutoFit/>
-          </a:bodyPr>
-          <a:lstStyle/>
-          <a:p>
-            <a:pPr>
-              <a:defRPr sz="1500" b="1">
-                <a:solidFill>
-                  <a:srgbClr val="FFFFFF"/>
-                </a:solidFill>
-              </a:defRPr>
-            </a:pPr>
-            <a:r>
-              <a:t>SSB Taharah Memo</a:t>
-            </a:r>
-          </a:p>
-          <a:p>
-            <a:pPr>
-              <a:defRPr sz="1000">
-                <a:solidFill>
-                  <a:srgbClr val="A855F7"/>
-                </a:solidFill>
-              </a:defRPr>
-            </a:pPr>
-            <a:r>
-              <a:t>Shariah Endorsement</a:t>
-            </a:r>
-          </a:p>
-          <a:p>
-            <a:pPr>
-              <a:spcBef>
-                <a:spcPts val="600"/>
-              </a:spcBef>
-              <a:defRPr sz="1200">
-                <a:solidFill>
-                  <a:srgbClr val="CBD5E1"/>
-                </a:solidFill>
-              </a:defRPr>
-            </a:pPr>
-            <a:r>
-              <a:t>•  Shariah Supervisory Board endorsement packet.</a:t>
-            </a:r>
-          </a:p>
-          <a:p>
-            <a:pPr>
-              <a:spcBef>
-                <a:spcPts val="600"/>
-              </a:spcBef>
-              <a:defRPr sz="1200">
-                <a:solidFill>
-                  <a:srgbClr val="CBD5E1"/>
-                </a:solidFill>
-              </a:defRPr>
-            </a:pPr>
-            <a:r>
-              <a:t>•  AAOIFI Standards 21 &amp; 35 compliance certificate.</a:t>
-            </a:r>
-          </a:p>
-          <a:p>
-            <a:pPr>
-              <a:spcBef>
-                <a:spcPts val="600"/>
-              </a:spcBef>
-              <a:defRPr sz="1200">
-                <a:solidFill>
-                  <a:srgbClr val="CBD5E1"/>
-                </a:solidFill>
-              </a:defRPr>
-            </a:pPr>
-            <a:r>
-              <a:t>•  Pre-drafted Bait Al-Zakat donation voucher prior to drawdown.</a:t>
+              <a:t>Regulatory Compliance</a:t>
+            </a:r>
+          </a:p>
+          <a:p>
+            <a:pPr>
+              <a:spcBef>
+                <a:spcPts val="500"/>
+              </a:spcBef>
+              <a:defRPr sz="1150">
+                <a:solidFill>
+                  <a:srgbClr val="CBD5E1"/>
+                </a:solidFill>
+              </a:defRPr>
+            </a:pPr>
+            <a:r>
+              <a:t>•  On-Premise PII Scrubbing: Strips sensitive Kuwait Civil IDs, private telephone numbers, and residential addresses prior to LLM processing.</a:t>
+            </a:r>
+          </a:p>
+          <a:p>
+            <a:pPr>
+              <a:spcBef>
+                <a:spcPts val="500"/>
+              </a:spcBef>
+              <a:defRPr sz="1150">
+                <a:solidFill>
+                  <a:srgbClr val="CBD5E1"/>
+                </a:solidFill>
+              </a:defRPr>
+            </a:pPr>
+            <a:r>
+              <a:t>•  Air-Gapped Compliance: Eliminates cross-border sovereign data leakage, adhering strictly to Central Bank of Kuwait (CBK) data sovereignty directives.</a:t>
+            </a:r>
+          </a:p>
+          <a:p>
+            <a:pPr>
+              <a:spcBef>
+                <a:spcPts val="500"/>
+              </a:spcBef>
+              <a:defRPr sz="1150">
+                <a:solidFill>
+                  <a:srgbClr val="CBD5E1"/>
+                </a:solidFill>
+              </a:defRPr>
+            </a:pPr>
+            <a:r>
+              <a:t>•  Cryptographic Provenance: Generates SHA-256 document fingerprints ensuring the ingested document has not been tampered with post-upload.</a:t>
             </a:r>
           </a:p>
         </p:txBody>
@@ -5066,7 +7073,7 @@
               </a:defRPr>
             </a:pPr>
             <a:r>
-              <a:t>Forensic Case Study: Gulf Pearl Foods (CR #204918-KW)</a:t>
+              <a:t>Pillar 2: Adversarial Forensic Circularization &amp; Conflict Detection</a:t>
             </a:r>
           </a:p>
         </p:txBody>
@@ -5080,6 +7087,143 @@
         <p:spPr>
           <a:xfrm>
             <a:off x="731520" y="1645920"/>
+            <a:ext cx="5120640" cy="4389120"/>
+          </a:xfrm>
+          <a:prstGeom prst="roundRect">
+            <a:avLst/>
+          </a:prstGeom>
+          <a:solidFill>
+            <a:srgbClr val="12192D"/>
+          </a:solidFill>
+          <a:ln w="19050">
+            <a:solidFill>
+              <a:srgbClr val="F59E0B"/>
+            </a:solidFill>
+          </a:ln>
+        </p:spPr>
+        <p:style>
+          <a:lnRef idx="1">
+            <a:schemeClr val="accent1"/>
+          </a:lnRef>
+          <a:fillRef idx="3">
+            <a:schemeClr val="accent1"/>
+          </a:fillRef>
+          <a:effectRef idx="2">
+            <a:schemeClr val="accent1"/>
+          </a:effectRef>
+          <a:fontRef idx="minor">
+            <a:schemeClr val="lt1"/>
+          </a:fontRef>
+        </p:style>
+        <p:txBody>
+          <a:bodyPr rtlCol="0" anchor="ctr"/>
+          <a:lstStyle/>
+          <a:p>
+            <a:pPr algn="ctr"/>
+          </a:p>
+        </p:txBody>
+      </p:sp>
+      <p:sp>
+        <p:nvSpPr>
+          <p:cNvPr id="6" name="TextBox 5"/>
+          <p:cNvSpPr txBox="1"/>
+          <p:nvPr/>
+        </p:nvSpPr>
+        <p:spPr>
+          <a:xfrm>
+            <a:off x="914400" y="1783080"/>
+            <a:ext cx="4754880" cy="4114800"/>
+          </a:xfrm>
+          <a:prstGeom prst="rect">
+            <a:avLst/>
+          </a:prstGeom>
+          <a:noFill/>
+        </p:spPr>
+        <p:txBody>
+          <a:bodyPr wrap="square">
+            <a:spAutoFit/>
+          </a:bodyPr>
+          <a:lstStyle/>
+          <a:p>
+            <a:pPr>
+              <a:defRPr sz="1500" b="1">
+                <a:solidFill>
+                  <a:srgbClr val="FFFFFF"/>
+                </a:solidFill>
+              </a:defRPr>
+            </a:pPr>
+            <a:r>
+              <a:t>How It Operates (Adversarial Checking)</a:t>
+            </a:r>
+          </a:p>
+          <a:p>
+            <a:pPr>
+              <a:defRPr sz="1000" b="1">
+                <a:solidFill>
+                  <a:srgbClr val="F59E0B"/>
+                </a:solidFill>
+              </a:defRPr>
+            </a:pPr>
+            <a:r>
+              <a:t>Multi-Source Intelligence</a:t>
+            </a:r>
+          </a:p>
+          <a:p>
+            <a:pPr>
+              <a:spcBef>
+                <a:spcPts val="500"/>
+              </a:spcBef>
+              <a:defRPr sz="1150">
+                <a:solidFill>
+                  <a:srgbClr val="CBD5E1"/>
+                </a:solidFill>
+              </a:defRPr>
+            </a:pPr>
+            <a:r>
+              <a:t>•  Cross-Document Verification: Treats every borrower statement as an adversarial claim that must be corroborated by independent official records.</a:t>
+            </a:r>
+          </a:p>
+          <a:p>
+            <a:pPr>
+              <a:spcBef>
+                <a:spcPts val="500"/>
+              </a:spcBef>
+              <a:defRPr sz="1150">
+                <a:solidFill>
+                  <a:srgbClr val="CBD5E1"/>
+                </a:solidFill>
+              </a:defRPr>
+            </a:pPr>
+            <a:r>
+              <a:t>•  Automated Circularization: Simultaneously cross-references loan application affidavits, audited financial footnotes (Notes 14, 18, 22), MOCI registration certificates, and Central Bank (CiNet) bureau reports.</a:t>
+            </a:r>
+          </a:p>
+          <a:p>
+            <a:pPr>
+              <a:spcBef>
+                <a:spcPts val="500"/>
+              </a:spcBef>
+              <a:defRPr sz="1150">
+                <a:solidFill>
+                  <a:srgbClr val="CBD5E1"/>
+                </a:solidFill>
+              </a:defRPr>
+            </a:pPr>
+            <a:r>
+              <a:t>•  Conflict Exposure Quantification: Calculates the exact monetary exposure in KWD associated with each contradiction.</a:t>
+            </a:r>
+          </a:p>
+        </p:txBody>
+      </p:sp>
+      <p:sp>
+        <p:nvSpPr>
+          <p:cNvPr id="7" name="Rounded Rectangle 6"/>
+          <p:cNvSpPr/>
+          <p:nvPr/>
+        </p:nvSpPr>
+        <p:spPr>
+          <a:xfrm>
+            <a:off x="6217920" y="1645920"/>
             <a:ext cx="5120640" cy="4389120"/>
           </a:xfrm>
           <a:prstGeom prst="roundRect">
@@ -5118,13 +7262,13 @@
       </p:sp>
       <p:sp>
         <p:nvSpPr>
-          <p:cNvPr id="6" name="TextBox 5"/>
+          <p:cNvPr id="8" name="TextBox 7"/>
           <p:cNvSpPr txBox="1"/>
           <p:nvPr/>
         </p:nvSpPr>
         <p:spPr>
           <a:xfrm>
-            <a:off x="914400" y="1783080"/>
+            <a:off x="6400800" y="1783080"/>
             <a:ext cx="4754880" cy="4114800"/>
           </a:xfrm>
           <a:prstGeom prst="rect">
@@ -5146,216 +7290,64 @@
               </a:defRPr>
             </a:pPr>
             <a:r>
-              <a:t>The Deception: Undisclosed Performance Bond</a:t>
-            </a:r>
-          </a:p>
-          <a:p>
-            <a:pPr>
-              <a:defRPr sz="1000">
+              <a:t>Autonomous Legal Remediation (How It Does It)</a:t>
+            </a:r>
+          </a:p>
+          <a:p>
+            <a:pPr>
+              <a:defRPr sz="1000" b="1">
                 <a:solidFill>
                   <a:srgbClr val="EF4444"/>
                 </a:solidFill>
               </a:defRPr>
             </a:pPr>
             <a:r>
-              <a:t>Discrepancy Ref #F-922</a:t>
-            </a:r>
-          </a:p>
-          <a:p>
-            <a:pPr>
-              <a:spcBef>
-                <a:spcPts val="600"/>
-              </a:spcBef>
-              <a:defRPr sz="1200">
-                <a:solidFill>
-                  <a:srgbClr val="CBD5E1"/>
-                </a:solidFill>
-              </a:defRPr>
-            </a:pPr>
-            <a:r>
-              <a:t>•  The Borrower Claim: In Credit Application Clause 5.2, company declared 'Zero Contingent Liabilities &amp; Zero Affiliate Guarantees'.</a:t>
-            </a:r>
-          </a:p>
-          <a:p>
-            <a:pPr>
-              <a:spcBef>
-                <a:spcPts val="600"/>
-              </a:spcBef>
-              <a:defRPr sz="1200">
-                <a:solidFill>
-                  <a:srgbClr val="CBD5E1"/>
-                </a:solidFill>
-              </a:defRPr>
-            </a:pPr>
-            <a:r>
-              <a:t>•  The Forensic Discovery: SANAD's automated circularization scanned Ministry of Justice Gazette Vol 44 and uncovered an active KWD 350,000 corporate bond issued to sister entity Pearl Logistics.</a:t>
-            </a:r>
-          </a:p>
-          <a:p>
-            <a:pPr>
-              <a:spcBef>
-                <a:spcPts val="600"/>
-              </a:spcBef>
-              <a:defRPr sz="1200">
-                <a:solidFill>
-                  <a:srgbClr val="CBD5E1"/>
-                </a:solidFill>
-              </a:defRPr>
-            </a:pPr>
-            <a:r>
-              <a:t>•  The Legal Risk: In a corporate liquidation, this undisclosed guarantee would dilute Warba Bank's ranking as senior secured creditor.</a:t>
-            </a:r>
-          </a:p>
-        </p:txBody>
-      </p:sp>
-      <p:sp>
-        <p:nvSpPr>
-          <p:cNvPr id="7" name="Rounded Rectangle 6"/>
-          <p:cNvSpPr/>
-          <p:nvPr/>
-        </p:nvSpPr>
-        <p:spPr>
-          <a:xfrm>
-            <a:off x="6217920" y="1645920"/>
-            <a:ext cx="5120640" cy="4389120"/>
-          </a:xfrm>
-          <a:prstGeom prst="roundRect">
-            <a:avLst/>
-          </a:prstGeom>
-          <a:solidFill>
-            <a:srgbClr val="12192D"/>
-          </a:solidFill>
-          <a:ln w="19050">
-            <a:solidFill>
-              <a:srgbClr val="10B981"/>
-            </a:solidFill>
-          </a:ln>
-        </p:spPr>
-        <p:style>
-          <a:lnRef idx="1">
-            <a:schemeClr val="accent1"/>
-          </a:lnRef>
-          <a:fillRef idx="3">
-            <a:schemeClr val="accent1"/>
-          </a:fillRef>
-          <a:effectRef idx="2">
-            <a:schemeClr val="accent1"/>
-          </a:effectRef>
-          <a:fontRef idx="minor">
-            <a:schemeClr val="lt1"/>
-          </a:fontRef>
-        </p:style>
-        <p:txBody>
-          <a:bodyPr rtlCol="0" anchor="ctr"/>
-          <a:lstStyle/>
-          <a:p>
-            <a:pPr algn="ctr"/>
-          </a:p>
-        </p:txBody>
-      </p:sp>
-      <p:sp>
-        <p:nvSpPr>
-          <p:cNvPr id="8" name="TextBox 7"/>
-          <p:cNvSpPr txBox="1"/>
-          <p:nvPr/>
-        </p:nvSpPr>
-        <p:spPr>
-          <a:xfrm>
-            <a:off x="6400800" y="1783080"/>
-            <a:ext cx="4754880" cy="4114800"/>
-          </a:xfrm>
-          <a:prstGeom prst="rect">
-            <a:avLst/>
-          </a:prstGeom>
-          <a:noFill/>
-        </p:spPr>
-        <p:txBody>
-          <a:bodyPr wrap="square">
-            <a:spAutoFit/>
-          </a:bodyPr>
-          <a:lstStyle/>
-          <a:p>
-            <a:pPr>
-              <a:defRPr sz="1500" b="1">
-                <a:solidFill>
-                  <a:srgbClr val="FFFFFF"/>
-                </a:solidFill>
-              </a:defRPr>
-            </a:pPr>
-            <a:r>
-              <a:t>The Automated Remediation: Protective Covenant</a:t>
-            </a:r>
-          </a:p>
-          <a:p>
-            <a:pPr>
-              <a:defRPr sz="1000">
-                <a:solidFill>
-                  <a:srgbClr val="10B981"/>
-                </a:solidFill>
-              </a:defRPr>
-            </a:pPr>
-            <a:r>
-              <a:t>Autonomous Legal Armor</a:t>
-            </a:r>
-          </a:p>
-          <a:p>
-            <a:pPr>
-              <a:spcBef>
-                <a:spcPts val="600"/>
-              </a:spcBef>
-              <a:defRPr sz="1200">
-                <a:solidFill>
-                  <a:srgbClr val="CBD5E1"/>
-                </a:solidFill>
-              </a:defRPr>
-            </a:pPr>
-            <a:r>
-              <a:t>•  Condition Precedent: SANAD automatically synthesized a mandatory Condition Precedent for the credit agreement:</a:t>
-            </a:r>
-          </a:p>
-          <a:p>
-            <a:pPr>
-              <a:spcBef>
-                <a:spcPts val="600"/>
-              </a:spcBef>
-              <a:defRPr sz="1200">
-                <a:solidFill>
-                  <a:srgbClr val="CBD5E1"/>
-                </a:solidFill>
-              </a:defRPr>
-            </a:pPr>
-            <a:r>
-              <a:t>•  'Borrower must execute an irrevocable Priority &amp; Subordination Deed ranking Warba Bank facility senior to affiliate guarantee.'</a:t>
-            </a:r>
-          </a:p>
-          <a:p>
-            <a:pPr>
-              <a:spcBef>
-                <a:spcPts val="600"/>
-              </a:spcBef>
-              <a:defRPr sz="1200">
-                <a:solidFill>
-                  <a:srgbClr val="CBD5E1"/>
-                </a:solidFill>
-              </a:defRPr>
-            </a:pPr>
-            <a:r>
-              <a:t>•  Audited Citations: Directly links credit committee members to Gazette Entry 18 and Balance Sheet Note 14 in 1 click.</a:t>
-            </a:r>
-          </a:p>
-          <a:p>
-            <a:pPr>
-              <a:spcBef>
-                <a:spcPts val="600"/>
-              </a:spcBef>
-              <a:defRPr sz="1200">
-                <a:solidFill>
-                  <a:srgbClr val="CBD5E1"/>
-                </a:solidFill>
-              </a:defRPr>
-            </a:pPr>
-            <a:r>
-              <a:t>•  Result: Prevents KWD 350,000 credit impairment before facility drawdown.</a:t>
+              <a:t>Defensive Structuring</a:t>
+            </a:r>
+          </a:p>
+          <a:p>
+            <a:pPr>
+              <a:spcBef>
+                <a:spcPts val="500"/>
+              </a:spcBef>
+              <a:defRPr sz="1150">
+                <a:solidFill>
+                  <a:srgbClr val="CBD5E1"/>
+                </a:solidFill>
+              </a:defRPr>
+            </a:pPr>
+            <a:r>
+              <a:t>•  Automated Covenant Generation: When an undisclosed liability is caught (e.g. sister-company bond), SANAD does not merely reject the file.</a:t>
+            </a:r>
+          </a:p>
+          <a:p>
+            <a:pPr>
+              <a:spcBef>
+                <a:spcPts val="500"/>
+              </a:spcBef>
+              <a:defRPr sz="1150">
+                <a:solidFill>
+                  <a:srgbClr val="CBD5E1"/>
+                </a:solidFill>
+              </a:defRPr>
+            </a:pPr>
+            <a:r>
+              <a:t>•  Synthesis of Legal Armor: Automatically drafts the exact protective Condition Precedent: 'Borrower must execute an irrevocable Priority &amp; Subordination Deed ranking Warba Bank senior to affiliate debenture.'</a:t>
+            </a:r>
+          </a:p>
+          <a:p>
+            <a:pPr>
+              <a:spcBef>
+                <a:spcPts val="500"/>
+              </a:spcBef>
+              <a:defRPr sz="1150">
+                <a:solidFill>
+                  <a:srgbClr val="CBD5E1"/>
+                </a:solidFill>
+              </a:defRPr>
+            </a:pPr>
+            <a:r>
+              <a:t>•  1-Click Evidence Grounding: Committee members click citation pills to view the verbatim conflicting document excerpts side-by-side.</a:t>
             </a:r>
           </a:p>
         </p:txBody>
@@ -5486,7 +7478,7 @@
               </a:defRPr>
             </a:pPr>
             <a:r>
-              <a:t>Shariah Governance: AAOIFI Standard No. 21 &amp; Taharah</a:t>
+              <a:t>Pillar 3: AAOIFI Shariah Core &amp; Autonomous Taharah Purification</a:t>
             </a:r>
           </a:p>
         </p:txBody>
@@ -5566,64 +7558,79 @@
               </a:defRPr>
             </a:pPr>
             <a:r>
-              <a:t>Non-Halal Revenue Purification</a:t>
-            </a:r>
-          </a:p>
-          <a:p>
-            <a:pPr>
-              <a:defRPr sz="1000">
+              <a:t>AAOIFI Standard No. 21 Screening</a:t>
+            </a:r>
+          </a:p>
+          <a:p>
+            <a:pPr>
+              <a:defRPr sz="1000" b="1">
                 <a:solidFill>
                   <a:srgbClr val="10B981"/>
                 </a:solidFill>
               </a:defRPr>
             </a:pPr>
             <a:r>
-              <a:t>AAOIFI Standard No. 21</a:t>
-            </a:r>
-          </a:p>
-          <a:p>
-            <a:pPr>
-              <a:spcBef>
-                <a:spcPts val="600"/>
-              </a:spcBef>
-              <a:defRPr sz="1200">
-                <a:solidFill>
-                  <a:srgbClr val="CBD5E1"/>
-                </a:solidFill>
-              </a:defRPr>
-            </a:pPr>
-            <a:r>
-              <a:t>•  Footnote Forensic Screening: Screened P&amp;L Note 7 ('Other Income') and detected KWD 7,900 in conventional deposit interest.</a:t>
-            </a:r>
-          </a:p>
-          <a:p>
-            <a:pPr>
-              <a:spcBef>
-                <a:spcPts val="600"/>
-              </a:spcBef>
-              <a:defRPr sz="1200">
-                <a:solidFill>
-                  <a:srgbClr val="CBD5E1"/>
-                </a:solidFill>
-              </a:defRPr>
-            </a:pPr>
-            <a:r>
-              <a:t>•  AAOIFI Standard 21 Compliance: Prohibited income stands at 0.09% of turnover, safely below the 5.0% maximum ceiling.</a:t>
-            </a:r>
-          </a:p>
-          <a:p>
-            <a:pPr>
-              <a:spcBef>
-                <a:spcPts val="600"/>
-              </a:spcBef>
-              <a:defRPr sz="1200">
-                <a:solidFill>
-                  <a:srgbClr val="CBD5E1"/>
-                </a:solidFill>
-              </a:defRPr>
-            </a:pPr>
-            <a:r>
-              <a:t>•  Mandatory Disgorgement: 100% of the KWD 7,900 must be disgorged to designated charity Bait Al-Zakat Kuwait before facility disbursement.</a:t>
+              <a:t>Financial Papers Standard</a:t>
+            </a:r>
+          </a:p>
+          <a:p>
+            <a:pPr>
+              <a:spcBef>
+                <a:spcPts val="500"/>
+              </a:spcBef>
+              <a:defRPr sz="1150">
+                <a:solidFill>
+                  <a:srgbClr val="CBD5E1"/>
+                </a:solidFill>
+              </a:defRPr>
+            </a:pPr>
+            <a:r>
+              <a:t>•  Footnote Scanning: Screens P&amp;L schedules and 'Other Income' footnotes for conventional bank interest and non-halal sub-lease income.</a:t>
+            </a:r>
+          </a:p>
+          <a:p>
+            <a:pPr>
+              <a:spcBef>
+                <a:spcPts val="500"/>
+              </a:spcBef>
+              <a:defRPr sz="1150">
+                <a:solidFill>
+                  <a:srgbClr val="CBD5E1"/>
+                </a:solidFill>
+              </a:defRPr>
+            </a:pPr>
+            <a:r>
+              <a:t>•  Prohibited Income Test: Prohibited Income ÷ Total Revenue must remain &lt; 5.0% (e.g. Gulf Pearl Foods = 0.09% PASS; Qabas Trading = 8.40% BREACH).</a:t>
+            </a:r>
+          </a:p>
+          <a:p>
+            <a:pPr>
+              <a:spcBef>
+                <a:spcPts val="500"/>
+              </a:spcBef>
+              <a:defRPr sz="1150">
+                <a:solidFill>
+                  <a:srgbClr val="CBD5E1"/>
+                </a:solidFill>
+              </a:defRPr>
+            </a:pPr>
+            <a:r>
+              <a:t>•  Debt-to-Assets Leverage Test: Conventional Interest-Bearing Debt ÷ Total Assets must remain &lt; 30.0% (e.g. Gulf Pearl = 22.4% PASS; Qabas = 42.5% BREACH).</a:t>
+            </a:r>
+          </a:p>
+          <a:p>
+            <a:pPr>
+              <a:spcBef>
+                <a:spcPts val="500"/>
+              </a:spcBef>
+              <a:defRPr sz="1150">
+                <a:solidFill>
+                  <a:srgbClr val="CBD5E1"/>
+                </a:solidFill>
+              </a:defRPr>
+            </a:pPr>
+            <a:r>
+              <a:t>•  Liquid Assets Floor: Evaluates cash and liquid instruments against the 33.0% minimum threshold.</a:t>
             </a:r>
           </a:p>
         </p:txBody>
@@ -5703,64 +7710,79 @@
               </a:defRPr>
             </a:pPr>
             <a:r>
-              <a:t>Zakat Base Computation</a:t>
-            </a:r>
-          </a:p>
-          <a:p>
-            <a:pPr>
-              <a:defRPr sz="1000">
+              <a:t>Deterministic Taharah &amp; Zakat Calculation</a:t>
+            </a:r>
+          </a:p>
+          <a:p>
+            <a:pPr>
+              <a:defRPr sz="1000" b="1">
                 <a:solidFill>
                   <a:srgbClr val="3B82F6"/>
                 </a:solidFill>
               </a:defRPr>
             </a:pPr>
             <a:r>
-              <a:t>AAOIFI Standard No. 35</a:t>
-            </a:r>
-          </a:p>
-          <a:p>
-            <a:pPr>
-              <a:spcBef>
-                <a:spcPts val="600"/>
-              </a:spcBef>
-              <a:defRPr sz="1200">
-                <a:solidFill>
-                  <a:srgbClr val="CBD5E1"/>
-                </a:solidFill>
-              </a:defRPr>
-            </a:pPr>
-            <a:r>
-              <a:t>•  Step-Down Zakat Calculation: Zakatable base proxy computed at KWD 3,480,000 (60% of total assets).</a:t>
-            </a:r>
-          </a:p>
-          <a:p>
-            <a:pPr>
-              <a:spcBef>
-                <a:spcPts val="600"/>
-              </a:spcBef>
-              <a:defRPr sz="1200">
-                <a:solidFill>
-                  <a:srgbClr val="CBD5E1"/>
-                </a:solidFill>
-              </a:defRPr>
-            </a:pPr>
-            <a:r>
-              <a:t>•  Solar Calendar Rate: Applied 2.577% solar Zakat factor (AAOIFI Standard No. 35) = KWD 89,679 payable.</a:t>
-            </a:r>
-          </a:p>
-          <a:p>
-            <a:pPr>
-              <a:spcBef>
-                <a:spcPts val="600"/>
-              </a:spcBef>
-              <a:defRPr sz="1200">
-                <a:solidFill>
-                  <a:srgbClr val="CBD5E1"/>
-                </a:solidFill>
-              </a:defRPr>
-            </a:pPr>
-            <a:r>
-              <a:t>•  Ready Transfer Order: Pre-drafts electronic remittance voucher so relationship manager can close the transaction without Shariah audit delays.</a:t>
+              <a:t>Standard No. 35 Zakat</a:t>
+            </a:r>
+          </a:p>
+          <a:p>
+            <a:pPr>
+              <a:spcBef>
+                <a:spcPts val="500"/>
+              </a:spcBef>
+              <a:defRPr sz="1150">
+                <a:solidFill>
+                  <a:srgbClr val="CBD5E1"/>
+                </a:solidFill>
+              </a:defRPr>
+            </a:pPr>
+            <a:r>
+              <a:t>•  100% Disgorgement Mandate: 100% of non-compliant earnings are isolated down to the fil for purification (Taharah).</a:t>
+            </a:r>
+          </a:p>
+          <a:p>
+            <a:pPr>
+              <a:spcBef>
+                <a:spcPts val="500"/>
+              </a:spcBef>
+              <a:defRPr sz="1150">
+                <a:solidFill>
+                  <a:srgbClr val="CBD5E1"/>
+                </a:solidFill>
+              </a:defRPr>
+            </a:pPr>
+            <a:r>
+              <a:t>•  Bait Al-Zakat Remittance Voucher: Pre-drafts electronic remittance voucher designating Bait Al-Zakat Kuwait (General Waqf Fund) as beneficiary.</a:t>
+            </a:r>
+          </a:p>
+          <a:p>
+            <a:pPr>
+              <a:spcBef>
+                <a:spcPts val="500"/>
+              </a:spcBef>
+              <a:defRPr sz="1150">
+                <a:solidFill>
+                  <a:srgbClr val="CBD5E1"/>
+                </a:solidFill>
+              </a:defRPr>
+            </a:pPr>
+            <a:r>
+              <a:t>•  AAOIFI Standard No. 35 (Zakat): Calculates the Zakatable base using the step-down proxy (60% of total assets) and applies the 2.577% solar Zakat factor.</a:t>
+            </a:r>
+          </a:p>
+          <a:p>
+            <a:pPr>
+              <a:spcBef>
+                <a:spcPts val="500"/>
+              </a:spcBef>
+              <a:defRPr sz="1150">
+                <a:solidFill>
+                  <a:srgbClr val="CBD5E1"/>
+                </a:solidFill>
+              </a:defRPr>
+            </a:pPr>
+            <a:r>
+              <a:t>•  Zero Shariah Friction: Transforms a multi-week Shariah Board review into an instant, deterministic sign-off.</a:t>
             </a:r>
           </a:p>
         </p:txBody>
@@ -5891,7 +7913,7 @@
               </a:defRPr>
             </a:pPr>
             <a:r>
-              <a:t>Proactive RM Radar &amp; Commercial Impact</a:t>
+              <a:t>Pillar 4: Financial Analytics &amp; Live Covenant Stress Simulator</a:t>
             </a:r>
           </a:p>
         </p:txBody>
@@ -5905,7 +7927,7 @@
         <p:spPr>
           <a:xfrm>
             <a:off x="731520" y="1645920"/>
-            <a:ext cx="3291840" cy="4389120"/>
+            <a:ext cx="5120640" cy="4389120"/>
           </a:xfrm>
           <a:prstGeom prst="roundRect">
             <a:avLst/>
@@ -5950,7 +7972,7 @@
         <p:spPr>
           <a:xfrm>
             <a:off x="914400" y="1783080"/>
-            <a:ext cx="2926080" cy="4114800"/>
+            <a:ext cx="4754880" cy="4114800"/>
           </a:xfrm>
           <a:prstGeom prst="rect">
             <a:avLst/>
@@ -5971,79 +7993,94 @@
               </a:defRPr>
             </a:pPr>
             <a:r>
-              <a:t>Turnaround Velocity</a:t>
-            </a:r>
-          </a:p>
-          <a:p>
-            <a:pPr>
-              <a:defRPr sz="1000">
+              <a:t>Cash Flow Velocity &amp; Ratio Engine</a:t>
+            </a:r>
+          </a:p>
+          <a:p>
+            <a:pPr>
+              <a:defRPr sz="1000" b="1">
                 <a:solidFill>
                   <a:srgbClr val="3B82F6"/>
                 </a:solidFill>
               </a:defRPr>
             </a:pPr>
             <a:r>
-              <a:t>Time-to-Yes</a:t>
-            </a:r>
-          </a:p>
-          <a:p>
-            <a:pPr>
-              <a:spcBef>
-                <a:spcPts val="600"/>
-              </a:spcBef>
-              <a:defRPr sz="1200">
-                <a:solidFill>
-                  <a:srgbClr val="CBD5E1"/>
-                </a:solidFill>
-              </a:defRPr>
-            </a:pPr>
-            <a:r>
-              <a:t>•  11 Days → 38 Seconds</a:t>
-            </a:r>
-          </a:p>
-          <a:p>
-            <a:pPr>
-              <a:spcBef>
-                <a:spcPts val="600"/>
-              </a:spcBef>
-              <a:defRPr sz="1200">
-                <a:solidFill>
-                  <a:srgbClr val="CBD5E1"/>
-                </a:solidFill>
-              </a:defRPr>
-            </a:pPr>
-            <a:r>
-              <a:t>•  94% reduction in manual document synthesis time.</a:t>
-            </a:r>
-          </a:p>
-          <a:p>
-            <a:pPr>
-              <a:spcBef>
-                <a:spcPts val="600"/>
-              </a:spcBef>
-              <a:defRPr sz="1200">
-                <a:solidFill>
-                  <a:srgbClr val="CBD5E1"/>
-                </a:solidFill>
-              </a:defRPr>
-            </a:pPr>
-            <a:r>
-              <a:t>•  Accelerates credit approval turnaround from 2 weeks to same-day committee review.</a:t>
-            </a:r>
-          </a:p>
-          <a:p>
-            <a:pPr>
-              <a:spcBef>
-                <a:spcPts val="600"/>
-              </a:spcBef>
-              <a:defRPr sz="1200">
-                <a:solidFill>
-                  <a:srgbClr val="CBD5E1"/>
-                </a:solidFill>
-              </a:defRPr>
-            </a:pPr>
-            <a:r>
-              <a:t>•  Allows Warba Bank to win prime commercial borrowers first.</a:t>
+              <a:t>Core Banking Formulas</a:t>
+            </a:r>
+          </a:p>
+          <a:p>
+            <a:pPr>
+              <a:spcBef>
+                <a:spcPts val="500"/>
+              </a:spcBef>
+              <a:defRPr sz="1150">
+                <a:solidFill>
+                  <a:srgbClr val="CBD5E1"/>
+                </a:solidFill>
+              </a:defRPr>
+            </a:pPr>
+            <a:r>
+              <a:t>•  Normalized Operating EBITDA: Filters out non-recurring gains to establish true sustainable cash flow.</a:t>
+            </a:r>
+          </a:p>
+          <a:p>
+            <a:pPr>
+              <a:spcBef>
+                <a:spcPts val="500"/>
+              </a:spcBef>
+              <a:defRPr sz="1150">
+                <a:solidFill>
+                  <a:srgbClr val="CBD5E1"/>
+                </a:solidFill>
+              </a:defRPr>
+            </a:pPr>
+            <a:r>
+              <a:t>•  Debt Service Coverage Ratio (DSCR): Calculated dynamically as Operating EBITDA ÷ Total Annual Debt Service commitments.</a:t>
+            </a:r>
+          </a:p>
+          <a:p>
+            <a:pPr>
+              <a:spcBef>
+                <a:spcPts val="500"/>
+              </a:spcBef>
+              <a:defRPr sz="1150">
+                <a:solidFill>
+                  <a:srgbClr val="CBD5E1"/>
+                </a:solidFill>
+              </a:defRPr>
+            </a:pPr>
+            <a:r>
+              <a:t>•  Covenant Floor Enforcement: Enforces Warba Bank's strict 1.25x minimum DSCR policy threshold.</a:t>
+            </a:r>
+          </a:p>
+          <a:p>
+            <a:pPr>
+              <a:spcBef>
+                <a:spcPts val="500"/>
+              </a:spcBef>
+              <a:defRPr sz="1150">
+                <a:solidFill>
+                  <a:srgbClr val="CBD5E1"/>
+                </a:solidFill>
+              </a:defRPr>
+            </a:pPr>
+            <a:r>
+              <a:t>•  Loan-to-Value (LTV): Evaluates facility size against certified real estate or asset appraisal backing (Policy ceiling: 80.0%).</a:t>
+            </a:r>
+          </a:p>
+          <a:p>
+            <a:pPr>
+              <a:spcBef>
+                <a:spcPts val="500"/>
+              </a:spcBef>
+              <a:defRPr sz="1150">
+                <a:solidFill>
+                  <a:srgbClr val="CBD5E1"/>
+                </a:solidFill>
+              </a:defRPr>
+            </a:pPr>
+            <a:r>
+              <a:t>•  Cash Conversion Forensics: Computes Days Sales Outstanding (DSO) and compares against industry benchmarks.</a:t>
             </a:r>
           </a:p>
         </p:txBody>
@@ -6056,160 +8093,8 @@
         </p:nvSpPr>
         <p:spPr>
           <a:xfrm>
-            <a:off x="4389120" y="1645920"/>
-            <a:ext cx="3291840" cy="4389120"/>
-          </a:xfrm>
-          <a:prstGeom prst="roundRect">
-            <a:avLst/>
-          </a:prstGeom>
-          <a:solidFill>
-            <a:srgbClr val="12192D"/>
-          </a:solidFill>
-          <a:ln w="19050">
-            <a:solidFill>
-              <a:srgbClr val="10B981"/>
-            </a:solidFill>
-          </a:ln>
-        </p:spPr>
-        <p:style>
-          <a:lnRef idx="1">
-            <a:schemeClr val="accent1"/>
-          </a:lnRef>
-          <a:fillRef idx="3">
-            <a:schemeClr val="accent1"/>
-          </a:fillRef>
-          <a:effectRef idx="2">
-            <a:schemeClr val="accent1"/>
-          </a:effectRef>
-          <a:fontRef idx="minor">
-            <a:schemeClr val="lt1"/>
-          </a:fontRef>
-        </p:style>
-        <p:txBody>
-          <a:bodyPr rtlCol="0" anchor="ctr"/>
-          <a:lstStyle/>
-          <a:p>
-            <a:pPr algn="ctr"/>
-          </a:p>
-        </p:txBody>
-      </p:sp>
-      <p:sp>
-        <p:nvSpPr>
-          <p:cNvPr id="8" name="TextBox 7"/>
-          <p:cNvSpPr txBox="1"/>
-          <p:nvPr/>
-        </p:nvSpPr>
-        <p:spPr>
-          <a:xfrm>
-            <a:off x="4572000" y="1783080"/>
-            <a:ext cx="2926080" cy="4114800"/>
-          </a:xfrm>
-          <a:prstGeom prst="rect">
-            <a:avLst/>
-          </a:prstGeom>
-          <a:noFill/>
-        </p:spPr>
-        <p:txBody>
-          <a:bodyPr wrap="square">
-            <a:spAutoFit/>
-          </a:bodyPr>
-          <a:lstStyle/>
-          <a:p>
-            <a:pPr>
-              <a:defRPr sz="1500" b="1">
-                <a:solidFill>
-                  <a:srgbClr val="FFFFFF"/>
-                </a:solidFill>
-              </a:defRPr>
-            </a:pPr>
-            <a:r>
-              <a:t>Proactive Balance-Sheet Growth</a:t>
-            </a:r>
-          </a:p>
-          <a:p>
-            <a:pPr>
-              <a:defRPr sz="1000">
-                <a:solidFill>
-                  <a:srgbClr val="10B981"/>
-                </a:solidFill>
-              </a:defRPr>
-            </a:pPr>
-            <a:r>
-              <a:t>RM Revenue Radar</a:t>
-            </a:r>
-          </a:p>
-          <a:p>
-            <a:pPr>
-              <a:spcBef>
-                <a:spcPts val="600"/>
-              </a:spcBef>
-              <a:defRPr sz="1200">
-                <a:solidFill>
-                  <a:srgbClr val="CBD5E1"/>
-                </a:solidFill>
-              </a:defRPr>
-            </a:pPr>
-            <a:r>
-              <a:t>•  +KWD 700K Facility Expansion</a:t>
-            </a:r>
-          </a:p>
-          <a:p>
-            <a:pPr>
-              <a:spcBef>
-                <a:spcPts val="600"/>
-              </a:spcBef>
-              <a:defRPr sz="1200">
-                <a:solidFill>
-                  <a:srgbClr val="CBD5E1"/>
-                </a:solidFill>
-              </a:defRPr>
-            </a:pPr>
-            <a:r>
-              <a:t>•  Identified unencumbered liquid inventory cushion of KWD 1.2M.</a:t>
-            </a:r>
-          </a:p>
-          <a:p>
-            <a:pPr>
-              <a:spcBef>
-                <a:spcPts val="600"/>
-              </a:spcBef>
-              <a:defRPr sz="1200">
-                <a:solidFill>
-                  <a:srgbClr val="CBD5E1"/>
-                </a:solidFill>
-              </a:defRPr>
-            </a:pPr>
-            <a:r>
-              <a:t>•  Automatically recommended +KWD 700k Murabaha facility expansion.</a:t>
-            </a:r>
-          </a:p>
-          <a:p>
-            <a:pPr>
-              <a:spcBef>
-                <a:spcPts val="600"/>
-              </a:spcBef>
-              <a:defRPr sz="1200">
-                <a:solidFill>
-                  <a:srgbClr val="CBD5E1"/>
-                </a:solidFill>
-              </a:defRPr>
-            </a:pPr>
-            <a:r>
-              <a:t>•  Generates +KWD 39,375 annual net profit margin for Warba Bank.</a:t>
-            </a:r>
-          </a:p>
-        </p:txBody>
-      </p:sp>
-      <p:sp>
-        <p:nvSpPr>
-          <p:cNvPr id="9" name="Rounded Rectangle 8"/>
-          <p:cNvSpPr/>
-          <p:nvPr/>
-        </p:nvSpPr>
-        <p:spPr>
-          <a:xfrm>
-            <a:off x="8046720" y="1645920"/>
-            <a:ext cx="3291840" cy="4389120"/>
+            <a:off x="6217920" y="1645920"/>
+            <a:ext cx="5120640" cy="4389120"/>
           </a:xfrm>
           <a:prstGeom prst="roundRect">
             <a:avLst/>
@@ -6247,14 +8132,14 @@
       </p:sp>
       <p:sp>
         <p:nvSpPr>
-          <p:cNvPr id="10" name="TextBox 9"/>
+          <p:cNvPr id="8" name="TextBox 7"/>
           <p:cNvSpPr txBox="1"/>
           <p:nvPr/>
         </p:nvSpPr>
         <p:spPr>
           <a:xfrm>
-            <a:off x="8229600" y="1783080"/>
-            <a:ext cx="2926080" cy="4114800"/>
+            <a:off x="6400800" y="1783080"/>
+            <a:ext cx="4754880" cy="4114800"/>
           </a:xfrm>
           <a:prstGeom prst="rect">
             <a:avLst/>
@@ -6275,79 +8160,94 @@
               </a:defRPr>
             </a:pPr>
             <a:r>
-              <a:t>Zero Compromise Governance</a:t>
-            </a:r>
-          </a:p>
-          <a:p>
-            <a:pPr>
-              <a:defRPr sz="1000">
+              <a:t>Real-Time Macroeconomic Stress Simulator</a:t>
+            </a:r>
+          </a:p>
+          <a:p>
+            <a:pPr>
+              <a:defRPr sz="1000" b="1">
                 <a:solidFill>
                   <a:srgbClr val="F59E0B"/>
                 </a:solidFill>
               </a:defRPr>
             </a:pPr>
             <a:r>
-              <a:t>Institutional Audit</a:t>
-            </a:r>
-          </a:p>
-          <a:p>
-            <a:pPr>
-              <a:spcBef>
-                <a:spcPts val="600"/>
-              </a:spcBef>
-              <a:defRPr sz="1200">
-                <a:solidFill>
-                  <a:srgbClr val="CBD5E1"/>
-                </a:solidFill>
-              </a:defRPr>
-            </a:pPr>
-            <a:r>
-              <a:t>•  Cryptographic Proof Ledger</a:t>
-            </a:r>
-          </a:p>
-          <a:p>
-            <a:pPr>
-              <a:spcBef>
-                <a:spcPts val="600"/>
-              </a:spcBef>
-              <a:defRPr sz="1200">
-                <a:solidFill>
-                  <a:srgbClr val="CBD5E1"/>
-                </a:solidFill>
-              </a:defRPr>
-            </a:pPr>
-            <a:r>
-              <a:t>•  Every footnote bound to SHA-256 hash and Merkle root block height.</a:t>
-            </a:r>
-          </a:p>
-          <a:p>
-            <a:pPr>
-              <a:spcBef>
-                <a:spcPts val="600"/>
-              </a:spcBef>
-              <a:defRPr sz="1200">
-                <a:solidFill>
-                  <a:srgbClr val="CBD5E1"/>
-                </a:solidFill>
-              </a:defRPr>
-            </a:pPr>
-            <a:r>
-              <a:t>•  Sequential 3-tier digital sign-offs (Analyst, SCU, Credit Committee).</a:t>
-            </a:r>
-          </a:p>
-          <a:p>
-            <a:pPr>
-              <a:spcBef>
-                <a:spcPts val="600"/>
-              </a:spcBef>
-              <a:defRPr sz="1200">
-                <a:solidFill>
-                  <a:srgbClr val="CBD5E1"/>
-                </a:solidFill>
-              </a:defRPr>
-            </a:pPr>
-            <a:r>
-              <a:t>•  Complete compliance with CBK circulars and AAOIFI standards.</a:t>
+              <a:t>Committee Decision Tool</a:t>
+            </a:r>
+          </a:p>
+          <a:p>
+            <a:pPr>
+              <a:spcBef>
+                <a:spcPts val="500"/>
+              </a:spcBef>
+              <a:defRPr sz="1150">
+                <a:solidFill>
+                  <a:srgbClr val="CBD5E1"/>
+                </a:solidFill>
+              </a:defRPr>
+            </a:pPr>
+            <a:r>
+              <a:t>•  Interactive Underwriting Sliders: Allows committee members to simulate stress scenarios live during committee deliberations.</a:t>
+            </a:r>
+          </a:p>
+          <a:p>
+            <a:pPr>
+              <a:spcBef>
+                <a:spcPts val="500"/>
+              </a:spcBef>
+              <a:defRPr sz="1150">
+                <a:solidFill>
+                  <a:srgbClr val="CBD5E1"/>
+                </a:solidFill>
+              </a:defRPr>
+            </a:pPr>
+            <a:r>
+              <a:t>•  Shock 1 (-15% to -25% Revenue Downturn): Models sector-wide supply chain disruptions and margin compression.</a:t>
+            </a:r>
+          </a:p>
+          <a:p>
+            <a:pPr>
+              <a:spcBef>
+                <a:spcPts val="500"/>
+              </a:spcBef>
+              <a:defRPr sz="1150">
+                <a:solidFill>
+                  <a:srgbClr val="CBD5E1"/>
+                </a:solidFill>
+              </a:defRPr>
+            </a:pPr>
+            <a:r>
+              <a:t>•  Shock 2 (+150 to +250 bps Rate Hike): Models Central Bank of Kuwait (CBK) discount rate tightening pass-through.</a:t>
+            </a:r>
+          </a:p>
+          <a:p>
+            <a:pPr>
+              <a:spcBef>
+                <a:spcPts val="500"/>
+              </a:spcBef>
+              <a:defRPr sz="1150">
+                <a:solidFill>
+                  <a:srgbClr val="CBD5E1"/>
+                </a:solidFill>
+              </a:defRPr>
+            </a:pPr>
+            <a:r>
+              <a:t>•  Combined Crisis Simulation: Simultaneously stresses revenue by -20% and benchmark rates by +250 bps to verify capital survival.</a:t>
+            </a:r>
+          </a:p>
+          <a:p>
+            <a:pPr>
+              <a:spcBef>
+                <a:spcPts val="500"/>
+              </a:spcBef>
+              <a:defRPr sz="1150">
+                <a:solidFill>
+                  <a:srgbClr val="CBD5E1"/>
+                </a:solidFill>
+              </a:defRPr>
+            </a:pPr>
+            <a:r>
+              <a:t>•  Immediate Visual Feedback: Recharts bar visualizer displays resulting DSCR against the 1.25x floor instantly.</a:t>
             </a:r>
           </a:p>
         </p:txBody>
@@ -6478,7 +8378,7 @@
               </a:defRPr>
             </a:pPr>
             <a:r>
-              <a:t>Ready for Production: Live Demo &amp; Verification</a:t>
+              <a:t>Track 1 Core Deliverable: Client Documentation Studio</a:t>
             </a:r>
           </a:p>
         </p:txBody>
@@ -6492,7 +8392,144 @@
         <p:spPr>
           <a:xfrm>
             <a:off x="731520" y="1645920"/>
-            <a:ext cx="10607040" cy="4389120"/>
+            <a:ext cx="2468880" cy="4389120"/>
+          </a:xfrm>
+          <a:prstGeom prst="roundRect">
+            <a:avLst/>
+          </a:prstGeom>
+          <a:solidFill>
+            <a:srgbClr val="12192D"/>
+          </a:solidFill>
+          <a:ln w="19050">
+            <a:solidFill>
+              <a:srgbClr val="3B82F6"/>
+            </a:solidFill>
+          </a:ln>
+        </p:spPr>
+        <p:style>
+          <a:lnRef idx="1">
+            <a:schemeClr val="accent1"/>
+          </a:lnRef>
+          <a:fillRef idx="3">
+            <a:schemeClr val="accent1"/>
+          </a:fillRef>
+          <a:effectRef idx="2">
+            <a:schemeClr val="accent1"/>
+          </a:effectRef>
+          <a:fontRef idx="minor">
+            <a:schemeClr val="lt1"/>
+          </a:fontRef>
+        </p:style>
+        <p:txBody>
+          <a:bodyPr rtlCol="0" anchor="ctr"/>
+          <a:lstStyle/>
+          <a:p>
+            <a:pPr algn="ctr"/>
+          </a:p>
+        </p:txBody>
+      </p:sp>
+      <p:sp>
+        <p:nvSpPr>
+          <p:cNvPr id="6" name="TextBox 5"/>
+          <p:cNvSpPr txBox="1"/>
+          <p:nvPr/>
+        </p:nvSpPr>
+        <p:spPr>
+          <a:xfrm>
+            <a:off x="914400" y="1783080"/>
+            <a:ext cx="2103120" cy="4114800"/>
+          </a:xfrm>
+          <a:prstGeom prst="rect">
+            <a:avLst/>
+          </a:prstGeom>
+          <a:noFill/>
+        </p:spPr>
+        <p:txBody>
+          <a:bodyPr wrap="square">
+            <a:spAutoFit/>
+          </a:bodyPr>
+          <a:lstStyle/>
+          <a:p>
+            <a:pPr>
+              <a:defRPr sz="1500" b="1">
+                <a:solidFill>
+                  <a:srgbClr val="FFFFFF"/>
+                </a:solidFill>
+              </a:defRPr>
+            </a:pPr>
+            <a:r>
+              <a:t>Credit Memo (CAM)</a:t>
+            </a:r>
+          </a:p>
+          <a:p>
+            <a:pPr>
+              <a:defRPr sz="1000" b="1">
+                <a:solidFill>
+                  <a:srgbClr val="3B82F6"/>
+                </a:solidFill>
+              </a:defRPr>
+            </a:pPr>
+            <a:r>
+              <a:t>Official Bank Template</a:t>
+            </a:r>
+          </a:p>
+          <a:p>
+            <a:pPr>
+              <a:spcBef>
+                <a:spcPts val="500"/>
+              </a:spcBef>
+              <a:defRPr sz="1150">
+                <a:solidFill>
+                  <a:srgbClr val="CBD5E1"/>
+                </a:solidFill>
+              </a:defRPr>
+            </a:pPr>
+            <a:r>
+              <a:t>•  Warba Bank Corporate Credit Committee executive format.</a:t>
+            </a:r>
+          </a:p>
+          <a:p>
+            <a:pPr>
+              <a:spcBef>
+                <a:spcPts val="500"/>
+              </a:spcBef>
+              <a:defRPr sz="1150">
+                <a:solidFill>
+                  <a:srgbClr val="CBD5E1"/>
+                </a:solidFill>
+              </a:defRPr>
+            </a:pPr>
+            <a:r>
+              <a:t>•  Transaction appraisal, historical revenue growth, operating margin, and DSCR velocity.</a:t>
+            </a:r>
+          </a:p>
+          <a:p>
+            <a:pPr>
+              <a:spcBef>
+                <a:spcPts val="500"/>
+              </a:spcBef>
+              <a:defRPr sz="1150">
+                <a:solidFill>
+                  <a:srgbClr val="CBD5E1"/>
+                </a:solidFill>
+              </a:defRPr>
+            </a:pPr>
+            <a:r>
+              <a:t>•  Footnote citations linked to SHA-256 verification hashes.</a:t>
+            </a:r>
+          </a:p>
+        </p:txBody>
+      </p:sp>
+      <p:sp>
+        <p:nvSpPr>
+          <p:cNvPr id="7" name="Rounded Rectangle 6"/>
+          <p:cNvSpPr/>
+          <p:nvPr/>
+        </p:nvSpPr>
+        <p:spPr>
+          <a:xfrm>
+            <a:off x="3474720" y="1645920"/>
+            <a:ext cx="2468880" cy="4389120"/>
           </a:xfrm>
           <a:prstGeom prst="roundRect">
             <a:avLst/>
@@ -6530,14 +8567,14 @@
       </p:sp>
       <p:sp>
         <p:nvSpPr>
-          <p:cNvPr id="6" name="TextBox 5"/>
+          <p:cNvPr id="8" name="TextBox 7"/>
           <p:cNvSpPr txBox="1"/>
           <p:nvPr/>
         </p:nvSpPr>
         <p:spPr>
           <a:xfrm>
-            <a:off x="914400" y="1783080"/>
-            <a:ext cx="10241280" cy="4114800"/>
+            <a:off x="3657600" y="1783080"/>
+            <a:ext cx="2103120" cy="4114800"/>
           </a:xfrm>
           <a:prstGeom prst="rect">
             <a:avLst/>
@@ -6558,184 +8595,773 @@
               </a:defRPr>
             </a:pPr>
             <a:r>
-              <a:t>Test the Live Production Application Directly</a:t>
-            </a:r>
-          </a:p>
-          <a:p>
-            <a:pPr>
-              <a:defRPr sz="1000">
+              <a:t>Murabaha Term Sheet</a:t>
+            </a:r>
+          </a:p>
+          <a:p>
+            <a:pPr>
+              <a:defRPr sz="1000" b="1">
                 <a:solidFill>
                   <a:srgbClr val="10B981"/>
                 </a:solidFill>
               </a:defRPr>
             </a:pPr>
             <a:r>
-              <a:t>Self-Guided Evaluation Protocol</a:t>
-            </a:r>
-          </a:p>
-          <a:p>
-            <a:pPr>
-              <a:spcBef>
-                <a:spcPts val="600"/>
-              </a:spcBef>
-              <a:defRPr sz="1200">
-                <a:solidFill>
-                  <a:srgbClr val="CBD5E1"/>
-                </a:solidFill>
-              </a:defRPr>
-            </a:pPr>
-            <a:r>
-              <a:t>•  🌐 Live Production Web App: https://sanad-engine.netlify.app</a:t>
-            </a:r>
-          </a:p>
-          <a:p>
-            <a:pPr>
-              <a:spcBef>
-                <a:spcPts val="600"/>
-              </a:spcBef>
-              <a:defRPr sz="1200">
-                <a:solidFill>
-                  <a:srgbClr val="CBD5E1"/>
-                </a:solidFill>
-              </a:defRPr>
-            </a:pPr>
-            <a:r>
-              <a:t>•  ⚡ Live Backend API: https://sanad-production-9d51.up.railway.app</a:t>
-            </a:r>
-          </a:p>
-          <a:p>
-            <a:pPr>
-              <a:spcBef>
-                <a:spcPts val="600"/>
-              </a:spcBef>
-              <a:defRPr sz="1200">
-                <a:solidFill>
-                  <a:srgbClr val="CBD5E1"/>
-                </a:solidFill>
-              </a:defRPr>
-            </a:pPr>
-            <a:r>
-              <a:t>•  📂 GitHub Code Repository: https://github.com/anajimdeen01-debug/sanad-frontend</a:t>
-            </a:r>
-          </a:p>
-          <a:p>
-            <a:pPr>
-              <a:spcBef>
-                <a:spcPts val="600"/>
-              </a:spcBef>
-              <a:defRPr sz="1200">
-                <a:solidFill>
-                  <a:srgbClr val="CBD5E1"/>
-                </a:solidFill>
-              </a:defRPr>
-            </a:pPr>
-            <a:r>
-              <a:t>•   </a:t>
-            </a:r>
-          </a:p>
-          <a:p>
-            <a:pPr>
-              <a:spcBef>
-                <a:spcPts val="600"/>
-              </a:spcBef>
-              <a:defRPr sz="1200">
-                <a:solidFill>
-                  <a:srgbClr val="CBD5E1"/>
-                </a:solidFill>
-              </a:defRPr>
-            </a:pPr>
-            <a:r>
-              <a:t>•  HOW TO EVALUATE IN 60 SECONDS:</a:t>
-            </a:r>
-          </a:p>
-          <a:p>
-            <a:pPr>
-              <a:spcBef>
-                <a:spcPts val="600"/>
-              </a:spcBef>
-              <a:defRPr sz="1200">
-                <a:solidFill>
-                  <a:srgbClr val="CBD5E1"/>
-                </a:solidFill>
-              </a:defRPr>
-            </a:pPr>
-            <a:r>
-              <a:t>•  1. Open Gulf Pearl Foods Trading (CR #204918-KW) from the main directory.</a:t>
-            </a:r>
-          </a:p>
-          <a:p>
-            <a:pPr>
-              <a:spcBef>
-                <a:spcPts val="600"/>
-              </a:spcBef>
-              <a:defRPr sz="1200">
-                <a:solidFill>
-                  <a:srgbClr val="CBD5E1"/>
-                </a:solidFill>
-              </a:defRPr>
-            </a:pPr>
-            <a:r>
-              <a:t>•  2. Read the 4 AI Forensic Chapters authored dynamically by Google Gemini.</a:t>
-            </a:r>
-          </a:p>
-          <a:p>
-            <a:pPr>
-              <a:spcBef>
-                <a:spcPts val="600"/>
-              </a:spcBef>
-              <a:defRPr sz="1200">
-                <a:solidFill>
-                  <a:srgbClr val="CBD5E1"/>
-                </a:solidFill>
-              </a:defRPr>
-            </a:pPr>
-            <a:r>
-              <a:t>•  3. Click citation [#F-922: Undisclosed Bond] to inspect the document provenance modal.</a:t>
-            </a:r>
-          </a:p>
-          <a:p>
-            <a:pPr>
-              <a:spcBef>
-                <a:spcPts val="600"/>
-              </a:spcBef>
-              <a:defRPr sz="1200">
-                <a:solidFill>
-                  <a:srgbClr val="CBD5E1"/>
-                </a:solidFill>
-              </a:defRPr>
-            </a:pPr>
-            <a:r>
-              <a:t>•  4. Click '⚡ Re-Analyze with Gemini' to watch live unscripted reasoning in real-time.</a:t>
-            </a:r>
-          </a:p>
-          <a:p>
-            <a:pPr>
-              <a:spcBef>
-                <a:spcPts val="600"/>
-              </a:spcBef>
-              <a:defRPr sz="1200">
-                <a:solidFill>
-                  <a:srgbClr val="CBD5E1"/>
-                </a:solidFill>
-              </a:defRPr>
-            </a:pPr>
-            <a:r>
-              <a:t>•  5. Slide the Revenue Stress slider to -25% and observe real-time DSCR recalculation.</a:t>
-            </a:r>
-          </a:p>
-          <a:p>
-            <a:pPr>
-              <a:spcBef>
-                <a:spcPts val="600"/>
-              </a:spcBef>
-              <a:defRPr sz="1200">
-                <a:solidFill>
-                  <a:srgbClr val="CBD5E1"/>
-                </a:solidFill>
-              </a:defRPr>
-            </a:pPr>
-            <a:r>
-              <a:t>•  6. Switch to 'Client Documentation Studio' to inspect the CAM, Term Sheet, and RM Brief.</a:t>
+              <a:t>Financing Contract</a:t>
+            </a:r>
+          </a:p>
+          <a:p>
+            <a:pPr>
+              <a:spcBef>
+                <a:spcPts val="500"/>
+              </a:spcBef>
+              <a:defRPr sz="1150">
+                <a:solidFill>
+                  <a:srgbClr val="CBD5E1"/>
+                </a:solidFill>
+              </a:defRPr>
+            </a:pPr>
+            <a:r>
+              <a:t>•  Binding financing agreement terms (Commodity Murabaha / Tawarruq).</a:t>
+            </a:r>
+          </a:p>
+          <a:p>
+            <a:pPr>
+              <a:spcBef>
+                <a:spcPts val="500"/>
+              </a:spcBef>
+              <a:defRPr sz="1150">
+                <a:solidFill>
+                  <a:srgbClr val="CBD5E1"/>
+                </a:solidFill>
+              </a:defRPr>
+            </a:pPr>
+            <a:r>
+              <a:t>•  Margin pricing: CBK Discount Rate + 2.25% p.a. (Profit floor 5.50%).</a:t>
+            </a:r>
+          </a:p>
+          <a:p>
+            <a:pPr>
+              <a:spcBef>
+                <a:spcPts val="500"/>
+              </a:spcBef>
+              <a:defRPr sz="1150">
+                <a:solidFill>
+                  <a:srgbClr val="CBD5E1"/>
+                </a:solidFill>
+              </a:defRPr>
+            </a:pPr>
+            <a:r>
+              <a:t>•  Mandatory covenants: Min 1.25x DSCR &amp; 1st-degree collateral lien.</a:t>
+            </a:r>
+          </a:p>
+        </p:txBody>
+      </p:sp>
+      <p:sp>
+        <p:nvSpPr>
+          <p:cNvPr id="9" name="Rounded Rectangle 8"/>
+          <p:cNvSpPr/>
+          <p:nvPr/>
+        </p:nvSpPr>
+        <p:spPr>
+          <a:xfrm>
+            <a:off x="6217920" y="1645920"/>
+            <a:ext cx="2468880" cy="4389120"/>
+          </a:xfrm>
+          <a:prstGeom prst="roundRect">
+            <a:avLst/>
+          </a:prstGeom>
+          <a:solidFill>
+            <a:srgbClr val="12192D"/>
+          </a:solidFill>
+          <a:ln w="19050">
+            <a:solidFill>
+              <a:srgbClr val="F59E0B"/>
+            </a:solidFill>
+          </a:ln>
+        </p:spPr>
+        <p:style>
+          <a:lnRef idx="1">
+            <a:schemeClr val="accent1"/>
+          </a:lnRef>
+          <a:fillRef idx="3">
+            <a:schemeClr val="accent1"/>
+          </a:fillRef>
+          <a:effectRef idx="2">
+            <a:schemeClr val="accent1"/>
+          </a:effectRef>
+          <a:fontRef idx="minor">
+            <a:schemeClr val="lt1"/>
+          </a:fontRef>
+        </p:style>
+        <p:txBody>
+          <a:bodyPr rtlCol="0" anchor="ctr"/>
+          <a:lstStyle/>
+          <a:p>
+            <a:pPr algn="ctr"/>
+          </a:p>
+        </p:txBody>
+      </p:sp>
+      <p:sp>
+        <p:nvSpPr>
+          <p:cNvPr id="10" name="TextBox 9"/>
+          <p:cNvSpPr txBox="1"/>
+          <p:nvPr/>
+        </p:nvSpPr>
+        <p:spPr>
+          <a:xfrm>
+            <a:off x="6400800" y="1783080"/>
+            <a:ext cx="2103120" cy="4114800"/>
+          </a:xfrm>
+          <a:prstGeom prst="rect">
+            <a:avLst/>
+          </a:prstGeom>
+          <a:noFill/>
+        </p:spPr>
+        <p:txBody>
+          <a:bodyPr wrap="square">
+            <a:spAutoFit/>
+          </a:bodyPr>
+          <a:lstStyle/>
+          <a:p>
+            <a:pPr>
+              <a:defRPr sz="1500" b="1">
+                <a:solidFill>
+                  <a:srgbClr val="FFFFFF"/>
+                </a:solidFill>
+              </a:defRPr>
+            </a:pPr>
+            <a:r>
+              <a:t>RM Executive Brief</a:t>
+            </a:r>
+          </a:p>
+          <a:p>
+            <a:pPr>
+              <a:defRPr sz="1000" b="1">
+                <a:solidFill>
+                  <a:srgbClr val="F59E0B"/>
+                </a:solidFill>
+              </a:defRPr>
+            </a:pPr>
+            <a:r>
+              <a:t>Front-Office Enabler</a:t>
+            </a:r>
+          </a:p>
+          <a:p>
+            <a:pPr>
+              <a:spcBef>
+                <a:spcPts val="500"/>
+              </a:spcBef>
+              <a:defRPr sz="1150">
+                <a:solidFill>
+                  <a:srgbClr val="CBD5E1"/>
+                </a:solidFill>
+              </a:defRPr>
+            </a:pPr>
+            <a:r>
+              <a:t>•  1-page commercial cheat-sheet for front-office relationship bankers.</a:t>
+            </a:r>
+          </a:p>
+          <a:p>
+            <a:pPr>
+              <a:spcBef>
+                <a:spcPts val="500"/>
+              </a:spcBef>
+              <a:defRPr sz="1150">
+                <a:solidFill>
+                  <a:srgbClr val="CBD5E1"/>
+                </a:solidFill>
+              </a:defRPr>
+            </a:pPr>
+            <a:r>
+              <a:t>•  Key negotiation talking points and operating strengths.</a:t>
+            </a:r>
+          </a:p>
+          <a:p>
+            <a:pPr>
+              <a:spcBef>
+                <a:spcPts val="500"/>
+              </a:spcBef>
+              <a:defRPr sz="1150">
+                <a:solidFill>
+                  <a:srgbClr val="CBD5E1"/>
+                </a:solidFill>
+              </a:defRPr>
+            </a:pPr>
+            <a:r>
+              <a:t>•  Expansion upsell triggers: +KWD 700k expansion &amp; trade LC financing.</a:t>
+            </a:r>
+          </a:p>
+        </p:txBody>
+      </p:sp>
+      <p:sp>
+        <p:nvSpPr>
+          <p:cNvPr id="11" name="Rounded Rectangle 10"/>
+          <p:cNvSpPr/>
+          <p:nvPr/>
+        </p:nvSpPr>
+        <p:spPr>
+          <a:xfrm>
+            <a:off x="8961120" y="1645920"/>
+            <a:ext cx="2468880" cy="4389120"/>
+          </a:xfrm>
+          <a:prstGeom prst="roundRect">
+            <a:avLst/>
+          </a:prstGeom>
+          <a:solidFill>
+            <a:srgbClr val="12192D"/>
+          </a:solidFill>
+          <a:ln w="19050">
+            <a:solidFill>
+              <a:srgbClr val="A855F7"/>
+            </a:solidFill>
+          </a:ln>
+        </p:spPr>
+        <p:style>
+          <a:lnRef idx="1">
+            <a:schemeClr val="accent1"/>
+          </a:lnRef>
+          <a:fillRef idx="3">
+            <a:schemeClr val="accent1"/>
+          </a:fillRef>
+          <a:effectRef idx="2">
+            <a:schemeClr val="accent1"/>
+          </a:effectRef>
+          <a:fontRef idx="minor">
+            <a:schemeClr val="lt1"/>
+          </a:fontRef>
+        </p:style>
+        <p:txBody>
+          <a:bodyPr rtlCol="0" anchor="ctr"/>
+          <a:lstStyle/>
+          <a:p>
+            <a:pPr algn="ctr"/>
+          </a:p>
+        </p:txBody>
+      </p:sp>
+      <p:sp>
+        <p:nvSpPr>
+          <p:cNvPr id="12" name="TextBox 11"/>
+          <p:cNvSpPr txBox="1"/>
+          <p:nvPr/>
+        </p:nvSpPr>
+        <p:spPr>
+          <a:xfrm>
+            <a:off x="9144000" y="1783080"/>
+            <a:ext cx="2103120" cy="4114800"/>
+          </a:xfrm>
+          <a:prstGeom prst="rect">
+            <a:avLst/>
+          </a:prstGeom>
+          <a:noFill/>
+        </p:spPr>
+        <p:txBody>
+          <a:bodyPr wrap="square">
+            <a:spAutoFit/>
+          </a:bodyPr>
+          <a:lstStyle/>
+          <a:p>
+            <a:pPr>
+              <a:defRPr sz="1500" b="1">
+                <a:solidFill>
+                  <a:srgbClr val="FFFFFF"/>
+                </a:solidFill>
+              </a:defRPr>
+            </a:pPr>
+            <a:r>
+              <a:t>SSB Taharah Memo</a:t>
+            </a:r>
+          </a:p>
+          <a:p>
+            <a:pPr>
+              <a:defRPr sz="1000" b="1">
+                <a:solidFill>
+                  <a:srgbClr val="A855F7"/>
+                </a:solidFill>
+              </a:defRPr>
+            </a:pPr>
+            <a:r>
+              <a:t>Shariah Endorsement</a:t>
+            </a:r>
+          </a:p>
+          <a:p>
+            <a:pPr>
+              <a:spcBef>
+                <a:spcPts val="500"/>
+              </a:spcBef>
+              <a:defRPr sz="1150">
+                <a:solidFill>
+                  <a:srgbClr val="CBD5E1"/>
+                </a:solidFill>
+              </a:defRPr>
+            </a:pPr>
+            <a:r>
+              <a:t>•  Shariah Supervisory Board endorsement packet.</a:t>
+            </a:r>
+          </a:p>
+          <a:p>
+            <a:pPr>
+              <a:spcBef>
+                <a:spcPts val="500"/>
+              </a:spcBef>
+              <a:defRPr sz="1150">
+                <a:solidFill>
+                  <a:srgbClr val="CBD5E1"/>
+                </a:solidFill>
+              </a:defRPr>
+            </a:pPr>
+            <a:r>
+              <a:t>•  AAOIFI Standards 21 &amp; 35 compliance certificate.</a:t>
+            </a:r>
+          </a:p>
+          <a:p>
+            <a:pPr>
+              <a:spcBef>
+                <a:spcPts val="500"/>
+              </a:spcBef>
+              <a:defRPr sz="1150">
+                <a:solidFill>
+                  <a:srgbClr val="CBD5E1"/>
+                </a:solidFill>
+              </a:defRPr>
+            </a:pPr>
+            <a:r>
+              <a:t>•  Pre-drafted Bait Al-Zakat donation voucher ready prior to drawdown.</a:t>
+            </a:r>
+          </a:p>
+        </p:txBody>
+      </p:sp>
+    </p:spTree>
+  </p:cSld>
+  <p:clrMapOvr>
+    <a:masterClrMapping/>
+  </p:clrMapOvr>
+</p:sld>
+</file>
+
+<file path=ppt/slides/slide9.xml><?xml version="1.0" encoding="utf-8"?>
+<p:sld xmlns:a="http://schemas.openxmlformats.org/drawingml/2006/main" xmlns:p="http://schemas.openxmlformats.org/presentationml/2006/main" xmlns:r="http://schemas.openxmlformats.org/officeDocument/2006/relationships">
+  <p:cSld>
+    <p:spTree>
+      <p:nvGrpSpPr>
+        <p:cNvPr id="1" name=""/>
+        <p:cNvGrpSpPr/>
+        <p:nvPr/>
+      </p:nvGrpSpPr>
+      <p:grpSpPr/>
+      <p:sp>
+        <p:nvSpPr>
+          <p:cNvPr id="2" name="Rectangle 1"/>
+          <p:cNvSpPr/>
+          <p:nvPr/>
+        </p:nvSpPr>
+        <p:spPr>
+          <a:xfrm>
+            <a:off x="0" y="0"/>
+            <a:ext cx="12191695" cy="6858000"/>
+          </a:xfrm>
+          <a:prstGeom prst="rect">
+            <a:avLst/>
+          </a:prstGeom>
+          <a:solidFill>
+            <a:srgbClr val="0B0F19"/>
+          </a:solidFill>
+          <a:ln>
+            <a:noFill/>
+          </a:ln>
+        </p:spPr>
+        <p:style>
+          <a:lnRef idx="1">
+            <a:schemeClr val="accent1"/>
+          </a:lnRef>
+          <a:fillRef idx="3">
+            <a:schemeClr val="accent1"/>
+          </a:fillRef>
+          <a:effectRef idx="2">
+            <a:schemeClr val="accent1"/>
+          </a:effectRef>
+          <a:fontRef idx="minor">
+            <a:schemeClr val="lt1"/>
+          </a:fontRef>
+        </p:style>
+        <p:txBody>
+          <a:bodyPr rtlCol="0" anchor="ctr"/>
+          <a:lstStyle/>
+          <a:p>
+            <a:pPr algn="ctr"/>
+          </a:p>
+        </p:txBody>
+      </p:sp>
+      <p:sp>
+        <p:nvSpPr>
+          <p:cNvPr id="3" name="TextBox 2"/>
+          <p:cNvSpPr txBox="1"/>
+          <p:nvPr/>
+        </p:nvSpPr>
+        <p:spPr>
+          <a:xfrm>
+            <a:off x="731520" y="365760"/>
+            <a:ext cx="10058400" cy="365760"/>
+          </a:xfrm>
+          <a:prstGeom prst="rect">
+            <a:avLst/>
+          </a:prstGeom>
+          <a:noFill/>
+        </p:spPr>
+        <p:txBody>
+          <a:bodyPr wrap="square">
+            <a:spAutoFit/>
+          </a:bodyPr>
+          <a:lstStyle/>
+          <a:p>
+            <a:pPr>
+              <a:defRPr sz="1100" b="1">
+                <a:solidFill>
+                  <a:srgbClr val="3B82F6"/>
+                </a:solidFill>
+              </a:defRPr>
+            </a:pPr>
+            <a:r>
+              <a:t>WARBA BANK CORPORATE BANKING · TRACK 1</a:t>
+            </a:r>
+          </a:p>
+        </p:txBody>
+      </p:sp>
+      <p:sp>
+        <p:nvSpPr>
+          <p:cNvPr id="4" name="TextBox 3"/>
+          <p:cNvSpPr txBox="1"/>
+          <p:nvPr/>
+        </p:nvSpPr>
+        <p:spPr>
+          <a:xfrm>
+            <a:off x="731520" y="685800"/>
+            <a:ext cx="10515600" cy="731520"/>
+          </a:xfrm>
+          <a:prstGeom prst="rect">
+            <a:avLst/>
+          </a:prstGeom>
+          <a:noFill/>
+        </p:spPr>
+        <p:txBody>
+          <a:bodyPr wrap="square">
+            <a:spAutoFit/>
+          </a:bodyPr>
+          <a:lstStyle/>
+          <a:p>
+            <a:pPr>
+              <a:defRPr sz="2200" b="1">
+                <a:solidFill>
+                  <a:srgbClr val="FFFFFF"/>
+                </a:solidFill>
+              </a:defRPr>
+            </a:pPr>
+            <a:r>
+              <a:t>Real-World Forensic Audit: Gulf Pearl Foods (CR #204918-KW)</a:t>
+            </a:r>
+          </a:p>
+        </p:txBody>
+      </p:sp>
+      <p:sp>
+        <p:nvSpPr>
+          <p:cNvPr id="5" name="Rounded Rectangle 4"/>
+          <p:cNvSpPr/>
+          <p:nvPr/>
+        </p:nvSpPr>
+        <p:spPr>
+          <a:xfrm>
+            <a:off x="731520" y="1645920"/>
+            <a:ext cx="5120640" cy="4389120"/>
+          </a:xfrm>
+          <a:prstGeom prst="roundRect">
+            <a:avLst/>
+          </a:prstGeom>
+          <a:solidFill>
+            <a:srgbClr val="12192D"/>
+          </a:solidFill>
+          <a:ln w="19050">
+            <a:solidFill>
+              <a:srgbClr val="EF4444"/>
+            </a:solidFill>
+          </a:ln>
+        </p:spPr>
+        <p:style>
+          <a:lnRef idx="1">
+            <a:schemeClr val="accent1"/>
+          </a:lnRef>
+          <a:fillRef idx="3">
+            <a:schemeClr val="accent1"/>
+          </a:fillRef>
+          <a:effectRef idx="2">
+            <a:schemeClr val="accent1"/>
+          </a:effectRef>
+          <a:fontRef idx="minor">
+            <a:schemeClr val="lt1"/>
+          </a:fontRef>
+        </p:style>
+        <p:txBody>
+          <a:bodyPr rtlCol="0" anchor="ctr"/>
+          <a:lstStyle/>
+          <a:p>
+            <a:pPr algn="ctr"/>
+          </a:p>
+        </p:txBody>
+      </p:sp>
+      <p:sp>
+        <p:nvSpPr>
+          <p:cNvPr id="6" name="TextBox 5"/>
+          <p:cNvSpPr txBox="1"/>
+          <p:nvPr/>
+        </p:nvSpPr>
+        <p:spPr>
+          <a:xfrm>
+            <a:off x="914400" y="1783080"/>
+            <a:ext cx="4754880" cy="4114800"/>
+          </a:xfrm>
+          <a:prstGeom prst="rect">
+            <a:avLst/>
+          </a:prstGeom>
+          <a:noFill/>
+        </p:spPr>
+        <p:txBody>
+          <a:bodyPr wrap="square">
+            <a:spAutoFit/>
+          </a:bodyPr>
+          <a:lstStyle/>
+          <a:p>
+            <a:pPr>
+              <a:defRPr sz="1500" b="1">
+                <a:solidFill>
+                  <a:srgbClr val="FFFFFF"/>
+                </a:solidFill>
+              </a:defRPr>
+            </a:pPr>
+            <a:r>
+              <a:t>The Deception: Undisclosed Performance Bond</a:t>
+            </a:r>
+          </a:p>
+          <a:p>
+            <a:pPr>
+              <a:defRPr sz="1000" b="1">
+                <a:solidFill>
+                  <a:srgbClr val="EF4444"/>
+                </a:solidFill>
+              </a:defRPr>
+            </a:pPr>
+            <a:r>
+              <a:t>Discrepancy Ref #F-922</a:t>
+            </a:r>
+          </a:p>
+          <a:p>
+            <a:pPr>
+              <a:spcBef>
+                <a:spcPts val="500"/>
+              </a:spcBef>
+              <a:defRPr sz="1150">
+                <a:solidFill>
+                  <a:srgbClr val="CBD5E1"/>
+                </a:solidFill>
+              </a:defRPr>
+            </a:pPr>
+            <a:r>
+              <a:t>•  The Borrower Claim: In Credit Application Clause 5.2, company asserted 'Zero Contingent Liabilities &amp; Zero Affiliate Guarantees'.</a:t>
+            </a:r>
+          </a:p>
+          <a:p>
+            <a:pPr>
+              <a:spcBef>
+                <a:spcPts val="500"/>
+              </a:spcBef>
+              <a:defRPr sz="1150">
+                <a:solidFill>
+                  <a:srgbClr val="CBD5E1"/>
+                </a:solidFill>
+              </a:defRPr>
+            </a:pPr>
+            <a:r>
+              <a:t>•  The Forensic Discovery: SANAD's automated circularization scanned Ministry of Justice Gazette Vol 44 and uncovered an active KWD 350,000 corporate bond issued to sister entity Pearl Logistics.</a:t>
+            </a:r>
+          </a:p>
+          <a:p>
+            <a:pPr>
+              <a:spcBef>
+                <a:spcPts val="500"/>
+              </a:spcBef>
+              <a:defRPr sz="1150">
+                <a:solidFill>
+                  <a:srgbClr val="CBD5E1"/>
+                </a:solidFill>
+              </a:defRPr>
+            </a:pPr>
+            <a:r>
+              <a:t>•  The Liquidation Risk: In insolvency, this hidden guarantee would dilute Warba Bank's ranking as senior secured creditor.</a:t>
+            </a:r>
+          </a:p>
+          <a:p>
+            <a:pPr>
+              <a:spcBef>
+                <a:spcPts val="500"/>
+              </a:spcBef>
+              <a:defRPr sz="1150">
+                <a:solidFill>
+                  <a:srgbClr val="CBD5E1"/>
+                </a:solidFill>
+              </a:defRPr>
+            </a:pPr>
+            <a:r>
+              <a:t>•  The Evidence Trail: Directly binds credit committee to Gazette Entry 18 and Balance Sheet Note 14.</a:t>
+            </a:r>
+          </a:p>
+        </p:txBody>
+      </p:sp>
+      <p:sp>
+        <p:nvSpPr>
+          <p:cNvPr id="7" name="Rounded Rectangle 6"/>
+          <p:cNvSpPr/>
+          <p:nvPr/>
+        </p:nvSpPr>
+        <p:spPr>
+          <a:xfrm>
+            <a:off x="6217920" y="1645920"/>
+            <a:ext cx="5120640" cy="4389120"/>
+          </a:xfrm>
+          <a:prstGeom prst="roundRect">
+            <a:avLst/>
+          </a:prstGeom>
+          <a:solidFill>
+            <a:srgbClr val="12192D"/>
+          </a:solidFill>
+          <a:ln w="19050">
+            <a:solidFill>
+              <a:srgbClr val="10B981"/>
+            </a:solidFill>
+          </a:ln>
+        </p:spPr>
+        <p:style>
+          <a:lnRef idx="1">
+            <a:schemeClr val="accent1"/>
+          </a:lnRef>
+          <a:fillRef idx="3">
+            <a:schemeClr val="accent1"/>
+          </a:fillRef>
+          <a:effectRef idx="2">
+            <a:schemeClr val="accent1"/>
+          </a:effectRef>
+          <a:fontRef idx="minor">
+            <a:schemeClr val="lt1"/>
+          </a:fontRef>
+        </p:style>
+        <p:txBody>
+          <a:bodyPr rtlCol="0" anchor="ctr"/>
+          <a:lstStyle/>
+          <a:p>
+            <a:pPr algn="ctr"/>
+          </a:p>
+        </p:txBody>
+      </p:sp>
+      <p:sp>
+        <p:nvSpPr>
+          <p:cNvPr id="8" name="TextBox 7"/>
+          <p:cNvSpPr txBox="1"/>
+          <p:nvPr/>
+        </p:nvSpPr>
+        <p:spPr>
+          <a:xfrm>
+            <a:off x="6400800" y="1783080"/>
+            <a:ext cx="4754880" cy="4114800"/>
+          </a:xfrm>
+          <a:prstGeom prst="rect">
+            <a:avLst/>
+          </a:prstGeom>
+          <a:noFill/>
+        </p:spPr>
+        <p:txBody>
+          <a:bodyPr wrap="square">
+            <a:spAutoFit/>
+          </a:bodyPr>
+          <a:lstStyle/>
+          <a:p>
+            <a:pPr>
+              <a:defRPr sz="1500" b="1">
+                <a:solidFill>
+                  <a:srgbClr val="FFFFFF"/>
+                </a:solidFill>
+              </a:defRPr>
+            </a:pPr>
+            <a:r>
+              <a:t>The Automated Remediation: Protective Covenant</a:t>
+            </a:r>
+          </a:p>
+          <a:p>
+            <a:pPr>
+              <a:defRPr sz="1000" b="1">
+                <a:solidFill>
+                  <a:srgbClr val="10B981"/>
+                </a:solidFill>
+              </a:defRPr>
+            </a:pPr>
+            <a:r>
+              <a:t>Autonomous Legal Armor</a:t>
+            </a:r>
+          </a:p>
+          <a:p>
+            <a:pPr>
+              <a:spcBef>
+                <a:spcPts val="500"/>
+              </a:spcBef>
+              <a:defRPr sz="1150">
+                <a:solidFill>
+                  <a:srgbClr val="CBD5E1"/>
+                </a:solidFill>
+              </a:defRPr>
+            </a:pPr>
+            <a:r>
+              <a:t>•  Condition Precedent: SANAD synthesized a mandatory Condition Precedent for the credit agreement:</a:t>
+            </a:r>
+          </a:p>
+          <a:p>
+            <a:pPr>
+              <a:spcBef>
+                <a:spcPts val="500"/>
+              </a:spcBef>
+              <a:defRPr sz="1150">
+                <a:solidFill>
+                  <a:srgbClr val="CBD5E1"/>
+                </a:solidFill>
+              </a:defRPr>
+            </a:pPr>
+            <a:r>
+              <a:t>•  'Borrower must execute an irrevocable Priority &amp; Subordination Deed ranking Warba Bank facility senior to affiliate guarantee.'</a:t>
+            </a:r>
+          </a:p>
+          <a:p>
+            <a:pPr>
+              <a:spcBef>
+                <a:spcPts val="500"/>
+              </a:spcBef>
+              <a:defRPr sz="1150">
+                <a:solidFill>
+                  <a:srgbClr val="CBD5E1"/>
+                </a:solidFill>
+              </a:defRPr>
+            </a:pPr>
+            <a:r>
+              <a:t>•  Shariah Purification: Detected KWD 7,900 conventional interest in Note 7; drafted transfer order to Bait Al-Zakat.</a:t>
+            </a:r>
+          </a:p>
+          <a:p>
+            <a:pPr>
+              <a:spcBef>
+                <a:spcPts val="500"/>
+              </a:spcBef>
+              <a:defRPr sz="1150">
+                <a:solidFill>
+                  <a:srgbClr val="CBD5E1"/>
+                </a:solidFill>
+              </a:defRPr>
+            </a:pPr>
+            <a:r>
+              <a:t>•  Outcome: Prevents KWD 350,000 credit impairment while closing the facility in 38 seconds.</a:t>
             </a:r>
           </a:p>
         </p:txBody>
